--- a/.byhand/structure.pptx
+++ b/.byhand/structure.pptx
@@ -6,9 +6,12 @@
   </p:sldMasterIdLst>
   <p:sldIdLst>
     <p:sldId id="258" r:id="rId2"/>
-    <p:sldId id="261" r:id="rId3"/>
-    <p:sldId id="257" r:id="rId4"/>
-    <p:sldId id="260" r:id="rId5"/>
+    <p:sldId id="267" r:id="rId3"/>
+    <p:sldId id="268" r:id="rId4"/>
+    <p:sldId id="265" r:id="rId5"/>
+    <p:sldId id="260" r:id="rId6"/>
+    <p:sldId id="264" r:id="rId7"/>
+    <p:sldId id="266" r:id="rId8"/>
   </p:sldIdLst>
   <p:sldSz cx="12192000" cy="6858000"/>
   <p:notesSz cx="6858000" cy="9144000"/>
@@ -262,7 +265,7 @@
           <a:p>
             <a:fld id="{E7892ED7-ED10-4C0E-B050-E725A33076E1}" type="datetimeFigureOut">
               <a:rPr lang="en-US" smtClean="0"/>
-              <a:t>2/9/2026</a:t>
+              <a:t>2/19/2026</a:t>
             </a:fld>
             <a:endParaRPr lang="en-US"/>
           </a:p>
@@ -460,7 +463,7 @@
           <a:p>
             <a:fld id="{E7892ED7-ED10-4C0E-B050-E725A33076E1}" type="datetimeFigureOut">
               <a:rPr lang="en-US" smtClean="0"/>
-              <a:t>2/9/2026</a:t>
+              <a:t>2/19/2026</a:t>
             </a:fld>
             <a:endParaRPr lang="en-US"/>
           </a:p>
@@ -668,7 +671,7 @@
           <a:p>
             <a:fld id="{E7892ED7-ED10-4C0E-B050-E725A33076E1}" type="datetimeFigureOut">
               <a:rPr lang="en-US" smtClean="0"/>
-              <a:t>2/9/2026</a:t>
+              <a:t>2/19/2026</a:t>
             </a:fld>
             <a:endParaRPr lang="en-US"/>
           </a:p>
@@ -866,7 +869,7 @@
           <a:p>
             <a:fld id="{E7892ED7-ED10-4C0E-B050-E725A33076E1}" type="datetimeFigureOut">
               <a:rPr lang="en-US" smtClean="0"/>
-              <a:t>2/9/2026</a:t>
+              <a:t>2/19/2026</a:t>
             </a:fld>
             <a:endParaRPr lang="en-US"/>
           </a:p>
@@ -1141,7 +1144,7 @@
           <a:p>
             <a:fld id="{E7892ED7-ED10-4C0E-B050-E725A33076E1}" type="datetimeFigureOut">
               <a:rPr lang="en-US" smtClean="0"/>
-              <a:t>2/9/2026</a:t>
+              <a:t>2/19/2026</a:t>
             </a:fld>
             <a:endParaRPr lang="en-US"/>
           </a:p>
@@ -1406,7 +1409,7 @@
           <a:p>
             <a:fld id="{E7892ED7-ED10-4C0E-B050-E725A33076E1}" type="datetimeFigureOut">
               <a:rPr lang="en-US" smtClean="0"/>
-              <a:t>2/9/2026</a:t>
+              <a:t>2/19/2026</a:t>
             </a:fld>
             <a:endParaRPr lang="en-US"/>
           </a:p>
@@ -1818,7 +1821,7 @@
           <a:p>
             <a:fld id="{E7892ED7-ED10-4C0E-B050-E725A33076E1}" type="datetimeFigureOut">
               <a:rPr lang="en-US" smtClean="0"/>
-              <a:t>2/9/2026</a:t>
+              <a:t>2/19/2026</a:t>
             </a:fld>
             <a:endParaRPr lang="en-US"/>
           </a:p>
@@ -1959,7 +1962,7 @@
           <a:p>
             <a:fld id="{E7892ED7-ED10-4C0E-B050-E725A33076E1}" type="datetimeFigureOut">
               <a:rPr lang="en-US" smtClean="0"/>
-              <a:t>2/9/2026</a:t>
+              <a:t>2/19/2026</a:t>
             </a:fld>
             <a:endParaRPr lang="en-US"/>
           </a:p>
@@ -2072,7 +2075,7 @@
           <a:p>
             <a:fld id="{E7892ED7-ED10-4C0E-B050-E725A33076E1}" type="datetimeFigureOut">
               <a:rPr lang="en-US" smtClean="0"/>
-              <a:t>2/9/2026</a:t>
+              <a:t>2/19/2026</a:t>
             </a:fld>
             <a:endParaRPr lang="en-US"/>
           </a:p>
@@ -2383,7 +2386,7 @@
           <a:p>
             <a:fld id="{E7892ED7-ED10-4C0E-B050-E725A33076E1}" type="datetimeFigureOut">
               <a:rPr lang="en-US" smtClean="0"/>
-              <a:t>2/9/2026</a:t>
+              <a:t>2/19/2026</a:t>
             </a:fld>
             <a:endParaRPr lang="en-US"/>
           </a:p>
@@ -2671,7 +2674,7 @@
           <a:p>
             <a:fld id="{E7892ED7-ED10-4C0E-B050-E725A33076E1}" type="datetimeFigureOut">
               <a:rPr lang="en-US" smtClean="0"/>
-              <a:t>2/9/2026</a:t>
+              <a:t>2/19/2026</a:t>
             </a:fld>
             <a:endParaRPr lang="en-US"/>
           </a:p>
@@ -2912,7 +2915,7 @@
           <a:p>
             <a:fld id="{E7892ED7-ED10-4C0E-B050-E725A33076E1}" type="datetimeFigureOut">
               <a:rPr lang="en-US" smtClean="0"/>
-              <a:t>2/9/2026</a:t>
+              <a:t>2/19/2026</a:t>
             </a:fld>
             <a:endParaRPr lang="en-US"/>
           </a:p>
@@ -3352,7 +3355,7 @@
           <a:p>
             <a:r>
               <a:rPr lang="en-US" dirty="0"/>
-              <a:t>Cloud &amp; DB</a:t>
+              <a:t>Process</a:t>
             </a:r>
           </a:p>
         </p:txBody>
@@ -3375,8 +3378,8 @@
         </p:nvSpPr>
         <p:spPr>
           <a:xfrm>
-            <a:off x="174522" y="1763215"/>
-            <a:ext cx="2998839" cy="1743689"/>
+            <a:off x="594856" y="1340780"/>
+            <a:ext cx="2313039" cy="937213"/>
           </a:xfrm>
           <a:prstGeom prst="cloud">
             <a:avLst/>
@@ -3404,7 +3407,7 @@
           <a:p>
             <a:pPr algn="ctr"/>
             <a:r>
-              <a:rPr lang="en-US" dirty="0" err="1"/>
+              <a:rPr lang="en-US" sz="2000" dirty="0" err="1"/>
               <a:t>Spitogatos</a:t>
             </a:r>
             <a:endParaRPr lang="en-US" dirty="0"/>
@@ -3427,8 +3430,8 @@
         </p:nvSpPr>
         <p:spPr>
           <a:xfrm>
-            <a:off x="4978809" y="529107"/>
-            <a:ext cx="2453149" cy="1851844"/>
+            <a:off x="103243" y="2380436"/>
+            <a:ext cx="1648133" cy="788416"/>
           </a:xfrm>
           <a:prstGeom prst="cloud">
             <a:avLst/>
@@ -3621,10 +3624,10 @@
           <a:p>
             <a:pPr algn="ctr"/>
             <a:r>
-              <a:rPr lang="en-US" dirty="0" err="1"/>
+              <a:rPr lang="en-US" sz="1800" dirty="0" err="1"/>
               <a:t>Cerved</a:t>
             </a:r>
-            <a:endParaRPr lang="en-US" dirty="0"/>
+            <a:endParaRPr lang="en-US" sz="1800" dirty="0"/>
           </a:p>
         </p:txBody>
       </p:sp>
@@ -3644,8 +3647,8 @@
         </p:nvSpPr>
         <p:spPr>
           <a:xfrm>
-            <a:off x="174522" y="4110089"/>
-            <a:ext cx="3082413" cy="1743689"/>
+            <a:off x="129664" y="4389079"/>
+            <a:ext cx="1890252" cy="871844"/>
           </a:xfrm>
           <a:prstGeom prst="cloud">
             <a:avLst/>
@@ -3838,7 +3841,7 @@
           <a:p>
             <a:pPr algn="ctr"/>
             <a:r>
-              <a:rPr lang="en-US" dirty="0"/>
+              <a:rPr lang="en-US" sz="1800" dirty="0"/>
               <a:t>Reinvest</a:t>
             </a:r>
           </a:p>
@@ -3860,8 +3863,8 @@
         </p:nvSpPr>
         <p:spPr>
           <a:xfrm>
-            <a:off x="3452351" y="4981933"/>
-            <a:ext cx="3082413" cy="1576746"/>
+            <a:off x="2808033" y="5614877"/>
+            <a:ext cx="1833716" cy="820193"/>
           </a:xfrm>
           <a:prstGeom prst="cloud">
             <a:avLst/>
@@ -4054,10 +4057,10 @@
           <a:p>
             <a:pPr algn="ctr"/>
             <a:r>
-              <a:rPr lang="en-US" dirty="0" err="1"/>
+              <a:rPr lang="en-US" sz="2000" dirty="0" err="1"/>
               <a:t>Intrum</a:t>
             </a:r>
-            <a:endParaRPr lang="en-US" dirty="0"/>
+            <a:endParaRPr lang="en-US" sz="2000" dirty="0"/>
           </a:p>
         </p:txBody>
       </p:sp>
@@ -4077,8 +4080,8 @@
         </p:nvSpPr>
         <p:spPr>
           <a:xfrm>
-            <a:off x="2738285" y="2700428"/>
-            <a:ext cx="3082413" cy="1576746"/>
+            <a:off x="27735" y="3271453"/>
+            <a:ext cx="1833715" cy="937213"/>
           </a:xfrm>
           <a:prstGeom prst="cloud">
             <a:avLst/>
@@ -4271,7 +4274,7 @@
           <a:p>
             <a:pPr algn="ctr"/>
             <a:r>
-              <a:rPr lang="en-US" dirty="0"/>
+              <a:rPr lang="en-US" sz="2000" dirty="0"/>
               <a:t>Landea</a:t>
             </a:r>
           </a:p>
@@ -4291,8 +4294,8 @@
         </p:nvSpPr>
         <p:spPr>
           <a:xfrm>
-            <a:off x="7397544" y="2418051"/>
-            <a:ext cx="4409768" cy="3384075"/>
+            <a:off x="5511597" y="2373951"/>
+            <a:ext cx="1726791" cy="1515261"/>
           </a:xfrm>
           <a:prstGeom prst="flowChartMagneticDisk">
             <a:avLst/>
@@ -4321,66 +4324,1307 @@
             <a:pPr algn="ctr"/>
             <a:r>
               <a:rPr lang="en-US" dirty="0"/>
-              <a:t>Assets:</a:t>
-            </a:r>
-          </a:p>
-          <a:p>
-            <a:pPr marL="285750" indent="-285750" algn="ctr">
+              <a:t>DB</a:t>
+            </a:r>
+          </a:p>
+        </p:txBody>
+      </p:sp>
+      <p:cxnSp>
+        <p:nvCxnSpPr>
+          <p:cNvPr id="11" name="Straight Arrow Connector 10">
+            <a:extLst>
+              <a:ext uri="{FF2B5EF4-FFF2-40B4-BE49-F238E27FC236}">
+                <a16:creationId xmlns:a16="http://schemas.microsoft.com/office/drawing/2014/main" id="{5B5AF9D3-0F20-C4A7-EAA7-16CE9325A1DD}"/>
+              </a:ext>
+            </a:extLst>
+          </p:cNvPr>
+          <p:cNvCxnSpPr>
+            <a:cxnSpLocks/>
+            <a:stCxn id="5" idx="1"/>
+            <a:endCxn id="9" idx="2"/>
+          </p:cNvCxnSpPr>
+          <p:nvPr/>
+        </p:nvCxnSpPr>
+        <p:spPr>
+          <a:xfrm flipV="1">
+            <a:off x="1074790" y="3131582"/>
+            <a:ext cx="4436807" cy="2128413"/>
+          </a:xfrm>
+          <a:prstGeom prst="straightConnector1">
+            <a:avLst/>
+          </a:prstGeom>
+          <a:ln>
+            <a:tailEnd type="triangle"/>
+          </a:ln>
+        </p:spPr>
+        <p:style>
+          <a:lnRef idx="1">
+            <a:schemeClr val="accent1"/>
+          </a:lnRef>
+          <a:fillRef idx="0">
+            <a:schemeClr val="accent1"/>
+          </a:fillRef>
+          <a:effectRef idx="0">
+            <a:schemeClr val="accent1"/>
+          </a:effectRef>
+          <a:fontRef idx="minor">
+            <a:schemeClr val="tx1"/>
+          </a:fontRef>
+        </p:style>
+      </p:cxnSp>
+      <p:cxnSp>
+        <p:nvCxnSpPr>
+          <p:cNvPr id="12" name="Straight Arrow Connector 11">
+            <a:extLst>
+              <a:ext uri="{FF2B5EF4-FFF2-40B4-BE49-F238E27FC236}">
+                <a16:creationId xmlns:a16="http://schemas.microsoft.com/office/drawing/2014/main" id="{680EEE73-D48D-8208-A4E5-4B8BA750DC54}"/>
+              </a:ext>
+            </a:extLst>
+          </p:cNvPr>
+          <p:cNvCxnSpPr>
+            <a:cxnSpLocks/>
+            <a:stCxn id="71" idx="1"/>
+            <a:endCxn id="9" idx="1"/>
+          </p:cNvCxnSpPr>
+          <p:nvPr/>
+        </p:nvCxnSpPr>
+        <p:spPr>
+          <a:xfrm flipV="1">
+            <a:off x="1751376" y="2373951"/>
+            <a:ext cx="4623617" cy="3885777"/>
+          </a:xfrm>
+          <a:prstGeom prst="straightConnector1">
+            <a:avLst/>
+          </a:prstGeom>
+          <a:ln>
+            <a:tailEnd type="triangle"/>
+          </a:ln>
+        </p:spPr>
+        <p:style>
+          <a:lnRef idx="1">
+            <a:schemeClr val="accent1"/>
+          </a:lnRef>
+          <a:fillRef idx="0">
+            <a:schemeClr val="accent1"/>
+          </a:fillRef>
+          <a:effectRef idx="0">
+            <a:schemeClr val="accent1"/>
+          </a:effectRef>
+          <a:fontRef idx="minor">
+            <a:schemeClr val="tx1"/>
+          </a:fontRef>
+        </p:style>
+      </p:cxnSp>
+      <p:cxnSp>
+        <p:nvCxnSpPr>
+          <p:cNvPr id="15" name="Straight Arrow Connector 14">
+            <a:extLst>
+              <a:ext uri="{FF2B5EF4-FFF2-40B4-BE49-F238E27FC236}">
+                <a16:creationId xmlns:a16="http://schemas.microsoft.com/office/drawing/2014/main" id="{812FDAE7-F3F7-7FD3-A968-040300FCA9F1}"/>
+              </a:ext>
+            </a:extLst>
+          </p:cNvPr>
+          <p:cNvCxnSpPr>
+            <a:cxnSpLocks/>
+            <a:stCxn id="6" idx="1"/>
+            <a:endCxn id="9" idx="2"/>
+          </p:cNvCxnSpPr>
+          <p:nvPr/>
+        </p:nvCxnSpPr>
+        <p:spPr>
+          <a:xfrm>
+            <a:off x="1751376" y="2276995"/>
+            <a:ext cx="3760221" cy="854587"/>
+          </a:xfrm>
+          <a:prstGeom prst="straightConnector1">
+            <a:avLst/>
+          </a:prstGeom>
+          <a:ln>
+            <a:tailEnd type="triangle"/>
+          </a:ln>
+        </p:spPr>
+        <p:style>
+          <a:lnRef idx="1">
+            <a:schemeClr val="accent1"/>
+          </a:lnRef>
+          <a:fillRef idx="0">
+            <a:schemeClr val="accent1"/>
+          </a:fillRef>
+          <a:effectRef idx="0">
+            <a:schemeClr val="accent1"/>
+          </a:effectRef>
+          <a:fontRef idx="minor">
+            <a:schemeClr val="tx1"/>
+          </a:fontRef>
+        </p:style>
+      </p:cxnSp>
+      <p:cxnSp>
+        <p:nvCxnSpPr>
+          <p:cNvPr id="18" name="Straight Arrow Connector 17">
+            <a:extLst>
+              <a:ext uri="{FF2B5EF4-FFF2-40B4-BE49-F238E27FC236}">
+                <a16:creationId xmlns:a16="http://schemas.microsoft.com/office/drawing/2014/main" id="{82286AF7-4855-7484-14EF-51F26075954F}"/>
+              </a:ext>
+            </a:extLst>
+          </p:cNvPr>
+          <p:cNvCxnSpPr>
+            <a:cxnSpLocks/>
+            <a:stCxn id="8" idx="1"/>
+            <a:endCxn id="9" idx="2"/>
+          </p:cNvCxnSpPr>
+          <p:nvPr/>
+        </p:nvCxnSpPr>
+        <p:spPr>
+          <a:xfrm flipV="1">
+            <a:off x="944593" y="3131582"/>
+            <a:ext cx="4567004" cy="1076086"/>
+          </a:xfrm>
+          <a:prstGeom prst="straightConnector1">
+            <a:avLst/>
+          </a:prstGeom>
+          <a:ln>
+            <a:tailEnd type="triangle"/>
+          </a:ln>
+        </p:spPr>
+        <p:style>
+          <a:lnRef idx="1">
+            <a:schemeClr val="accent1"/>
+          </a:lnRef>
+          <a:fillRef idx="0">
+            <a:schemeClr val="accent1"/>
+          </a:fillRef>
+          <a:effectRef idx="0">
+            <a:schemeClr val="accent1"/>
+          </a:effectRef>
+          <a:fontRef idx="minor">
+            <a:schemeClr val="tx1"/>
+          </a:fontRef>
+        </p:style>
+      </p:cxnSp>
+      <p:cxnSp>
+        <p:nvCxnSpPr>
+          <p:cNvPr id="21" name="Straight Arrow Connector 20">
+            <a:extLst>
+              <a:ext uri="{FF2B5EF4-FFF2-40B4-BE49-F238E27FC236}">
+                <a16:creationId xmlns:a16="http://schemas.microsoft.com/office/drawing/2014/main" id="{F94B3AC1-947A-5974-8ABC-D0AA7F3F9EFD}"/>
+              </a:ext>
+            </a:extLst>
+          </p:cNvPr>
+          <p:cNvCxnSpPr>
+            <a:cxnSpLocks/>
+            <a:stCxn id="4" idx="1"/>
+            <a:endCxn id="9" idx="2"/>
+          </p:cNvCxnSpPr>
+          <p:nvPr/>
+        </p:nvCxnSpPr>
+        <p:spPr>
+          <a:xfrm flipV="1">
+            <a:off x="927310" y="3131582"/>
+            <a:ext cx="4584287" cy="36430"/>
+          </a:xfrm>
+          <a:prstGeom prst="straightConnector1">
+            <a:avLst/>
+          </a:prstGeom>
+          <a:ln>
+            <a:tailEnd type="triangle"/>
+          </a:ln>
+        </p:spPr>
+        <p:style>
+          <a:lnRef idx="1">
+            <a:schemeClr val="accent1"/>
+          </a:lnRef>
+          <a:fillRef idx="0">
+            <a:schemeClr val="accent1"/>
+          </a:fillRef>
+          <a:effectRef idx="0">
+            <a:schemeClr val="accent1"/>
+          </a:effectRef>
+          <a:fontRef idx="minor">
+            <a:schemeClr val="tx1"/>
+          </a:fontRef>
+        </p:style>
+      </p:cxnSp>
+      <p:cxnSp>
+        <p:nvCxnSpPr>
+          <p:cNvPr id="26" name="Straight Arrow Connector 25">
+            <a:extLst>
+              <a:ext uri="{FF2B5EF4-FFF2-40B4-BE49-F238E27FC236}">
+                <a16:creationId xmlns:a16="http://schemas.microsoft.com/office/drawing/2014/main" id="{8C2DF5D4-7B6C-D1D2-AD02-B51D0FF2C3A5}"/>
+              </a:ext>
+            </a:extLst>
+          </p:cNvPr>
+          <p:cNvCxnSpPr>
+            <a:cxnSpLocks/>
+            <a:stCxn id="9" idx="4"/>
+            <a:endCxn id="38" idx="0"/>
+          </p:cNvCxnSpPr>
+          <p:nvPr/>
+        </p:nvCxnSpPr>
+        <p:spPr>
+          <a:xfrm>
+            <a:off x="7238388" y="3131582"/>
+            <a:ext cx="3762064" cy="791033"/>
+          </a:xfrm>
+          <a:prstGeom prst="straightConnector1">
+            <a:avLst/>
+          </a:prstGeom>
+          <a:ln>
+            <a:tailEnd type="triangle"/>
+          </a:ln>
+        </p:spPr>
+        <p:style>
+          <a:lnRef idx="1">
+            <a:schemeClr val="accent6"/>
+          </a:lnRef>
+          <a:fillRef idx="0">
+            <a:schemeClr val="accent6"/>
+          </a:fillRef>
+          <a:effectRef idx="0">
+            <a:schemeClr val="accent6"/>
+          </a:effectRef>
+          <a:fontRef idx="minor">
+            <a:schemeClr val="tx1"/>
+          </a:fontRef>
+        </p:style>
+      </p:cxnSp>
+      <p:cxnSp>
+        <p:nvCxnSpPr>
+          <p:cNvPr id="29" name="Straight Arrow Connector 28">
+            <a:extLst>
+              <a:ext uri="{FF2B5EF4-FFF2-40B4-BE49-F238E27FC236}">
+                <a16:creationId xmlns:a16="http://schemas.microsoft.com/office/drawing/2014/main" id="{7207622E-3D72-AF6D-677D-D6D4B3286312}"/>
+              </a:ext>
+            </a:extLst>
+          </p:cNvPr>
+          <p:cNvCxnSpPr>
+            <a:cxnSpLocks/>
+            <a:stCxn id="9" idx="4"/>
+            <a:endCxn id="35" idx="0"/>
+          </p:cNvCxnSpPr>
+          <p:nvPr/>
+        </p:nvCxnSpPr>
+        <p:spPr>
+          <a:xfrm flipV="1">
+            <a:off x="7238388" y="601175"/>
+            <a:ext cx="3804319" cy="2530407"/>
+          </a:xfrm>
+          <a:prstGeom prst="straightConnector1">
+            <a:avLst/>
+          </a:prstGeom>
+          <a:ln>
+            <a:tailEnd type="triangle"/>
+          </a:ln>
+        </p:spPr>
+        <p:style>
+          <a:lnRef idx="1">
+            <a:schemeClr val="accent6"/>
+          </a:lnRef>
+          <a:fillRef idx="0">
+            <a:schemeClr val="accent6"/>
+          </a:fillRef>
+          <a:effectRef idx="0">
+            <a:schemeClr val="accent6"/>
+          </a:effectRef>
+          <a:fontRef idx="minor">
+            <a:schemeClr val="tx1"/>
+          </a:fontRef>
+        </p:style>
+      </p:cxnSp>
+      <p:sp>
+        <p:nvSpPr>
+          <p:cNvPr id="35" name="Pentagon 34">
+            <a:extLst>
+              <a:ext uri="{FF2B5EF4-FFF2-40B4-BE49-F238E27FC236}">
+                <a16:creationId xmlns:a16="http://schemas.microsoft.com/office/drawing/2014/main" id="{0E5AE118-5013-00A0-6A01-B1D17EB7C7E5}"/>
+              </a:ext>
+            </a:extLst>
+          </p:cNvPr>
+          <p:cNvSpPr/>
+          <p:nvPr/>
+        </p:nvSpPr>
+        <p:spPr>
+          <a:xfrm>
+            <a:off x="9980823" y="601175"/>
+            <a:ext cx="2123768" cy="1508776"/>
+          </a:xfrm>
+          <a:prstGeom prst="pentagon">
+            <a:avLst/>
+          </a:prstGeom>
+        </p:spPr>
+        <p:style>
+          <a:lnRef idx="2">
+            <a:schemeClr val="accent6">
+              <a:shade val="15000"/>
+            </a:schemeClr>
+          </a:lnRef>
+          <a:fillRef idx="1">
+            <a:schemeClr val="accent6"/>
+          </a:fillRef>
+          <a:effectRef idx="0">
+            <a:schemeClr val="accent6"/>
+          </a:effectRef>
+          <a:fontRef idx="minor">
+            <a:schemeClr val="lt1"/>
+          </a:fontRef>
+        </p:style>
+        <p:txBody>
+          <a:bodyPr rtlCol="0" anchor="ctr"/>
+          <a:lstStyle/>
+          <a:p>
+            <a:pPr algn="ctr"/>
+            <a:r>
+              <a:rPr lang="en-US" dirty="0"/>
+              <a:t>Revaluation  of ***</a:t>
+            </a:r>
+          </a:p>
+        </p:txBody>
+      </p:sp>
+      <p:sp>
+        <p:nvSpPr>
+          <p:cNvPr id="38" name="Pentagon 37">
+            <a:extLst>
+              <a:ext uri="{FF2B5EF4-FFF2-40B4-BE49-F238E27FC236}">
+                <a16:creationId xmlns:a16="http://schemas.microsoft.com/office/drawing/2014/main" id="{D7B64FA2-E968-9537-B2B1-89A69CC9DFAD}"/>
+              </a:ext>
+            </a:extLst>
+          </p:cNvPr>
+          <p:cNvSpPr/>
+          <p:nvPr/>
+        </p:nvSpPr>
+        <p:spPr>
+          <a:xfrm>
+            <a:off x="9938568" y="3922615"/>
+            <a:ext cx="2123768" cy="1508776"/>
+          </a:xfrm>
+          <a:prstGeom prst="pentagon">
+            <a:avLst/>
+          </a:prstGeom>
+        </p:spPr>
+        <p:style>
+          <a:lnRef idx="2">
+            <a:schemeClr val="accent6">
+              <a:shade val="15000"/>
+            </a:schemeClr>
+          </a:lnRef>
+          <a:fillRef idx="1">
+            <a:schemeClr val="accent6"/>
+          </a:fillRef>
+          <a:effectRef idx="0">
+            <a:schemeClr val="accent6"/>
+          </a:effectRef>
+          <a:fontRef idx="minor">
+            <a:schemeClr val="lt1"/>
+          </a:fontRef>
+        </p:style>
+        <p:txBody>
+          <a:bodyPr rtlCol="0" anchor="ctr"/>
+          <a:lstStyle/>
+          <a:p>
+            <a:pPr algn="ctr"/>
+            <a:r>
+              <a:rPr lang="en-US" dirty="0"/>
+              <a:t>Best  of ***</a:t>
+            </a:r>
+          </a:p>
+        </p:txBody>
+      </p:sp>
+      <p:sp>
+        <p:nvSpPr>
+          <p:cNvPr id="41" name="Pentagon 40">
+            <a:extLst>
+              <a:ext uri="{FF2B5EF4-FFF2-40B4-BE49-F238E27FC236}">
+                <a16:creationId xmlns:a16="http://schemas.microsoft.com/office/drawing/2014/main" id="{F5172C11-22DA-6B04-2170-337DDBE79FD6}"/>
+              </a:ext>
+            </a:extLst>
+          </p:cNvPr>
+          <p:cNvSpPr/>
+          <p:nvPr/>
+        </p:nvSpPr>
+        <p:spPr>
+          <a:xfrm>
+            <a:off x="9980823" y="2261895"/>
+            <a:ext cx="2123768" cy="1508776"/>
+          </a:xfrm>
+          <a:prstGeom prst="pentagon">
+            <a:avLst/>
+          </a:prstGeom>
+        </p:spPr>
+        <p:style>
+          <a:lnRef idx="2">
+            <a:schemeClr val="accent6">
+              <a:shade val="15000"/>
+            </a:schemeClr>
+          </a:lnRef>
+          <a:fillRef idx="1">
+            <a:schemeClr val="accent6"/>
+          </a:fillRef>
+          <a:effectRef idx="0">
+            <a:schemeClr val="accent6"/>
+          </a:effectRef>
+          <a:fontRef idx="minor">
+            <a:schemeClr val="lt1"/>
+          </a:fontRef>
+        </p:style>
+        <p:txBody>
+          <a:bodyPr rtlCol="0" anchor="ctr"/>
+          <a:lstStyle/>
+          <a:p>
+            <a:pPr algn="ctr"/>
+            <a:r>
+              <a:rPr lang="en-US" b="1" dirty="0"/>
+              <a:t>Review  ***</a:t>
+            </a:r>
+          </a:p>
+        </p:txBody>
+      </p:sp>
+      <p:cxnSp>
+        <p:nvCxnSpPr>
+          <p:cNvPr id="42" name="Straight Arrow Connector 41">
+            <a:extLst>
+              <a:ext uri="{FF2B5EF4-FFF2-40B4-BE49-F238E27FC236}">
+                <a16:creationId xmlns:a16="http://schemas.microsoft.com/office/drawing/2014/main" id="{A09171AD-186B-AFAD-4F43-09B4D19B7479}"/>
+              </a:ext>
+            </a:extLst>
+          </p:cNvPr>
+          <p:cNvCxnSpPr>
+            <a:cxnSpLocks/>
+            <a:stCxn id="9" idx="4"/>
+            <a:endCxn id="41" idx="0"/>
+          </p:cNvCxnSpPr>
+          <p:nvPr/>
+        </p:nvCxnSpPr>
+        <p:spPr>
+          <a:xfrm flipV="1">
+            <a:off x="7238388" y="2261895"/>
+            <a:ext cx="3804319" cy="869687"/>
+          </a:xfrm>
+          <a:prstGeom prst="straightConnector1">
+            <a:avLst/>
+          </a:prstGeom>
+          <a:ln>
+            <a:tailEnd type="triangle"/>
+          </a:ln>
+        </p:spPr>
+        <p:style>
+          <a:lnRef idx="1">
+            <a:schemeClr val="accent6"/>
+          </a:lnRef>
+          <a:fillRef idx="0">
+            <a:schemeClr val="accent6"/>
+          </a:fillRef>
+          <a:effectRef idx="0">
+            <a:schemeClr val="accent6"/>
+          </a:effectRef>
+          <a:fontRef idx="minor">
+            <a:schemeClr val="tx1"/>
+          </a:fontRef>
+        </p:style>
+      </p:cxnSp>
+      <p:sp>
+        <p:nvSpPr>
+          <p:cNvPr id="66" name="Oval 65">
+            <a:extLst>
+              <a:ext uri="{FF2B5EF4-FFF2-40B4-BE49-F238E27FC236}">
+                <a16:creationId xmlns:a16="http://schemas.microsoft.com/office/drawing/2014/main" id="{7C43EB0A-EF85-90BB-E2DB-8B8A1143FE05}"/>
+              </a:ext>
+            </a:extLst>
+          </p:cNvPr>
+          <p:cNvSpPr/>
+          <p:nvPr/>
+        </p:nvSpPr>
+        <p:spPr>
+          <a:xfrm>
+            <a:off x="6509649" y="888775"/>
+            <a:ext cx="1890252" cy="766508"/>
+          </a:xfrm>
+          <a:prstGeom prst="ellipse">
+            <a:avLst/>
+          </a:prstGeom>
+        </p:spPr>
+        <p:style>
+          <a:lnRef idx="2">
+            <a:schemeClr val="accent2">
+              <a:shade val="15000"/>
+            </a:schemeClr>
+          </a:lnRef>
+          <a:fillRef idx="1">
+            <a:schemeClr val="accent2"/>
+          </a:fillRef>
+          <a:effectRef idx="0">
+            <a:schemeClr val="accent2"/>
+          </a:effectRef>
+          <a:fontRef idx="minor">
+            <a:schemeClr val="lt1"/>
+          </a:fontRef>
+        </p:style>
+        <p:txBody>
+          <a:bodyPr rtlCol="0" anchor="ctr"/>
+          <a:lstStyle/>
+          <a:p>
+            <a:pPr algn="ctr"/>
+            <a:r>
+              <a:rPr lang="en-US" dirty="0"/>
+              <a:t>Revaluating</a:t>
+            </a:r>
+          </a:p>
+        </p:txBody>
+      </p:sp>
+      <p:cxnSp>
+        <p:nvCxnSpPr>
+          <p:cNvPr id="68" name="Straight Connector 67">
+            <a:extLst>
+              <a:ext uri="{FF2B5EF4-FFF2-40B4-BE49-F238E27FC236}">
+                <a16:creationId xmlns:a16="http://schemas.microsoft.com/office/drawing/2014/main" id="{7D926C87-FB9F-E6E7-A539-926373F4C554}"/>
+              </a:ext>
+            </a:extLst>
+          </p:cNvPr>
+          <p:cNvCxnSpPr>
+            <a:cxnSpLocks/>
+            <a:stCxn id="9" idx="1"/>
+            <a:endCxn id="66" idx="4"/>
+          </p:cNvCxnSpPr>
+          <p:nvPr/>
+        </p:nvCxnSpPr>
+        <p:spPr>
+          <a:xfrm flipV="1">
+            <a:off x="6374993" y="1655283"/>
+            <a:ext cx="1079782" cy="718668"/>
+          </a:xfrm>
+          <a:prstGeom prst="line">
+            <a:avLst/>
+          </a:prstGeom>
+        </p:spPr>
+        <p:style>
+          <a:lnRef idx="1">
+            <a:schemeClr val="accent2"/>
+          </a:lnRef>
+          <a:fillRef idx="0">
+            <a:schemeClr val="accent2"/>
+          </a:fillRef>
+          <a:effectRef idx="0">
+            <a:schemeClr val="accent2"/>
+          </a:effectRef>
+          <a:fontRef idx="minor">
+            <a:schemeClr val="tx1"/>
+          </a:fontRef>
+        </p:style>
+      </p:cxnSp>
+      <p:sp>
+        <p:nvSpPr>
+          <p:cNvPr id="70" name="Oval 69">
+            <a:extLst>
+              <a:ext uri="{FF2B5EF4-FFF2-40B4-BE49-F238E27FC236}">
+                <a16:creationId xmlns:a16="http://schemas.microsoft.com/office/drawing/2014/main" id="{60136D6F-08EA-292A-3EFD-618530FFD066}"/>
+              </a:ext>
+            </a:extLst>
+          </p:cNvPr>
+          <p:cNvSpPr/>
+          <p:nvPr/>
+        </p:nvSpPr>
+        <p:spPr>
+          <a:xfrm>
+            <a:off x="4641749" y="798810"/>
+            <a:ext cx="1726791" cy="799195"/>
+          </a:xfrm>
+          <a:prstGeom prst="ellipse">
+            <a:avLst/>
+          </a:prstGeom>
+        </p:spPr>
+        <p:style>
+          <a:lnRef idx="2">
+            <a:schemeClr val="accent2">
+              <a:shade val="15000"/>
+            </a:schemeClr>
+          </a:lnRef>
+          <a:fillRef idx="1">
+            <a:schemeClr val="accent2"/>
+          </a:fillRef>
+          <a:effectRef idx="0">
+            <a:schemeClr val="accent2"/>
+          </a:effectRef>
+          <a:fontRef idx="minor">
+            <a:schemeClr val="lt1"/>
+          </a:fontRef>
+        </p:style>
+        <p:txBody>
+          <a:bodyPr rtlCol="0" anchor="ctr"/>
+          <a:lstStyle/>
+          <a:p>
+            <a:pPr algn="ctr"/>
+            <a:r>
+              <a:rPr lang="en-US" dirty="0"/>
+              <a:t>Image Processing</a:t>
+            </a:r>
+          </a:p>
+        </p:txBody>
+      </p:sp>
+      <p:sp>
+        <p:nvSpPr>
+          <p:cNvPr id="71" name="Content Placeholder 5">
+            <a:extLst>
+              <a:ext uri="{FF2B5EF4-FFF2-40B4-BE49-F238E27FC236}">
+                <a16:creationId xmlns:a16="http://schemas.microsoft.com/office/drawing/2014/main" id="{8FCDF2B7-757E-7F21-3F26-C9C419E800C5}"/>
+              </a:ext>
+            </a:extLst>
+          </p:cNvPr>
+          <p:cNvSpPr txBox="1">
+            <a:spLocks/>
+          </p:cNvSpPr>
+          <p:nvPr/>
+        </p:nvSpPr>
+        <p:spPr>
+          <a:xfrm>
+            <a:off x="834518" y="5440408"/>
+            <a:ext cx="1833716" cy="820193"/>
+          </a:xfrm>
+          <a:prstGeom prst="cloud">
+            <a:avLst/>
+          </a:prstGeom>
+        </p:spPr>
+        <p:style>
+          <a:lnRef idx="2">
+            <a:schemeClr val="accent1">
+              <a:shade val="15000"/>
+            </a:schemeClr>
+          </a:lnRef>
+          <a:fillRef idx="1">
+            <a:schemeClr val="accent1"/>
+          </a:fillRef>
+          <a:effectRef idx="0">
+            <a:schemeClr val="accent1"/>
+          </a:effectRef>
+          <a:fontRef idx="minor">
+            <a:schemeClr val="lt1"/>
+          </a:fontRef>
+        </p:style>
+        <p:txBody>
+          <a:bodyPr vert="horz" lIns="91440" tIns="45720" rIns="91440" bIns="45720" rtlCol="0" anchor="ctr">
+            <a:normAutofit/>
+          </a:bodyPr>
+          <a:lstStyle>
+            <a:lvl1pPr marL="228600" indent="-228600" algn="l" defTabSz="914400" rtl="0" eaLnBrk="1" latinLnBrk="0" hangingPunct="1">
+              <a:lnSpc>
+                <a:spcPct val="90000"/>
+              </a:lnSpc>
+              <a:spcBef>
+                <a:spcPts val="1000"/>
+              </a:spcBef>
               <a:buFont typeface="Arial" panose="020B0604020202020204" pitchFamily="34" charset="0"/>
               <a:buChar char="•"/>
-            </a:pPr>
-            <a:r>
-              <a:rPr lang="en-US" dirty="0"/>
-              <a:t>Table for each source</a:t>
-            </a:r>
-          </a:p>
-          <a:p>
-            <a:pPr marL="285750" indent="-285750" algn="ctr">
+              <a:defRPr sz="2800" kern="1200">
+                <a:solidFill>
+                  <a:schemeClr val="lt1"/>
+                </a:solidFill>
+                <a:latin typeface="+mn-lt"/>
+                <a:ea typeface="+mn-ea"/>
+                <a:cs typeface="+mn-cs"/>
+              </a:defRPr>
+            </a:lvl1pPr>
+            <a:lvl2pPr marL="685800" indent="-228600" algn="l" defTabSz="914400" rtl="0" eaLnBrk="1" latinLnBrk="0" hangingPunct="1">
+              <a:lnSpc>
+                <a:spcPct val="90000"/>
+              </a:lnSpc>
+              <a:spcBef>
+                <a:spcPts val="500"/>
+              </a:spcBef>
               <a:buFont typeface="Arial" panose="020B0604020202020204" pitchFamily="34" charset="0"/>
               <a:buChar char="•"/>
-            </a:pPr>
-            <a:r>
-              <a:rPr lang="en-US" dirty="0"/>
-              <a:t>Table for potential assets</a:t>
-            </a:r>
-          </a:p>
-          <a:p>
-            <a:pPr marL="285750" indent="-285750" algn="ctr">
+              <a:defRPr sz="2400" kern="1200">
+                <a:solidFill>
+                  <a:schemeClr val="lt1"/>
+                </a:solidFill>
+                <a:latin typeface="+mn-lt"/>
+                <a:ea typeface="+mn-ea"/>
+                <a:cs typeface="+mn-cs"/>
+              </a:defRPr>
+            </a:lvl2pPr>
+            <a:lvl3pPr marL="1143000" indent="-228600" algn="l" defTabSz="914400" rtl="0" eaLnBrk="1" latinLnBrk="0" hangingPunct="1">
+              <a:lnSpc>
+                <a:spcPct val="90000"/>
+              </a:lnSpc>
+              <a:spcBef>
+                <a:spcPts val="500"/>
+              </a:spcBef>
               <a:buFont typeface="Arial" panose="020B0604020202020204" pitchFamily="34" charset="0"/>
               <a:buChar char="•"/>
-            </a:pPr>
-            <a:r>
-              <a:rPr lang="en-US" dirty="0"/>
-              <a:t>Table for potentials, with all required data</a:t>
-            </a:r>
-          </a:p>
-          <a:p>
-            <a:pPr marL="285750" indent="-285750" algn="ctr">
+              <a:defRPr sz="2000" kern="1200">
+                <a:solidFill>
+                  <a:schemeClr val="lt1"/>
+                </a:solidFill>
+                <a:latin typeface="+mn-lt"/>
+                <a:ea typeface="+mn-ea"/>
+                <a:cs typeface="+mn-cs"/>
+              </a:defRPr>
+            </a:lvl3pPr>
+            <a:lvl4pPr marL="1600200" indent="-228600" algn="l" defTabSz="914400" rtl="0" eaLnBrk="1" latinLnBrk="0" hangingPunct="1">
+              <a:lnSpc>
+                <a:spcPct val="90000"/>
+              </a:lnSpc>
+              <a:spcBef>
+                <a:spcPts val="500"/>
+              </a:spcBef>
               <a:buFont typeface="Arial" panose="020B0604020202020204" pitchFamily="34" charset="0"/>
               <a:buChar char="•"/>
-            </a:pPr>
-            <a:r>
-              <a:rPr lang="en-US" dirty="0"/>
-              <a:t>Table for downloaded </a:t>
-            </a:r>
-            <a:r>
-              <a:rPr lang="en-US" dirty="0" err="1"/>
-              <a:t>Spitogatos</a:t>
-            </a:r>
-            <a:endParaRPr lang="en-US" dirty="0"/>
-          </a:p>
-          <a:p>
-            <a:pPr marL="285750" indent="-285750" algn="ctr">
+              <a:defRPr sz="1800" kern="1200">
+                <a:solidFill>
+                  <a:schemeClr val="lt1"/>
+                </a:solidFill>
+                <a:latin typeface="+mn-lt"/>
+                <a:ea typeface="+mn-ea"/>
+                <a:cs typeface="+mn-cs"/>
+              </a:defRPr>
+            </a:lvl4pPr>
+            <a:lvl5pPr marL="2057400" indent="-228600" algn="l" defTabSz="914400" rtl="0" eaLnBrk="1" latinLnBrk="0" hangingPunct="1">
+              <a:lnSpc>
+                <a:spcPct val="90000"/>
+              </a:lnSpc>
+              <a:spcBef>
+                <a:spcPts val="500"/>
+              </a:spcBef>
               <a:buFont typeface="Arial" panose="020B0604020202020204" pitchFamily="34" charset="0"/>
               <a:buChar char="•"/>
-            </a:pPr>
+              <a:defRPr sz="1800" kern="1200">
+                <a:solidFill>
+                  <a:schemeClr val="lt1"/>
+                </a:solidFill>
+                <a:latin typeface="+mn-lt"/>
+                <a:ea typeface="+mn-ea"/>
+                <a:cs typeface="+mn-cs"/>
+              </a:defRPr>
+            </a:lvl5pPr>
+            <a:lvl6pPr marL="2514600" indent="-228600" algn="l" defTabSz="914400" rtl="0" eaLnBrk="1" latinLnBrk="0" hangingPunct="1">
+              <a:lnSpc>
+                <a:spcPct val="90000"/>
+              </a:lnSpc>
+              <a:spcBef>
+                <a:spcPts val="500"/>
+              </a:spcBef>
+              <a:buFont typeface="Arial" panose="020B0604020202020204" pitchFamily="34" charset="0"/>
+              <a:buChar char="•"/>
+              <a:defRPr sz="1800" kern="1200">
+                <a:solidFill>
+                  <a:schemeClr val="lt1"/>
+                </a:solidFill>
+                <a:latin typeface="+mn-lt"/>
+                <a:ea typeface="+mn-ea"/>
+                <a:cs typeface="+mn-cs"/>
+              </a:defRPr>
+            </a:lvl6pPr>
+            <a:lvl7pPr marL="2971800" indent="-228600" algn="l" defTabSz="914400" rtl="0" eaLnBrk="1" latinLnBrk="0" hangingPunct="1">
+              <a:lnSpc>
+                <a:spcPct val="90000"/>
+              </a:lnSpc>
+              <a:spcBef>
+                <a:spcPts val="500"/>
+              </a:spcBef>
+              <a:buFont typeface="Arial" panose="020B0604020202020204" pitchFamily="34" charset="0"/>
+              <a:buChar char="•"/>
+              <a:defRPr sz="1800" kern="1200">
+                <a:solidFill>
+                  <a:schemeClr val="lt1"/>
+                </a:solidFill>
+                <a:latin typeface="+mn-lt"/>
+                <a:ea typeface="+mn-ea"/>
+                <a:cs typeface="+mn-cs"/>
+              </a:defRPr>
+            </a:lvl7pPr>
+            <a:lvl8pPr marL="3429000" indent="-228600" algn="l" defTabSz="914400" rtl="0" eaLnBrk="1" latinLnBrk="0" hangingPunct="1">
+              <a:lnSpc>
+                <a:spcPct val="90000"/>
+              </a:lnSpc>
+              <a:spcBef>
+                <a:spcPts val="500"/>
+              </a:spcBef>
+              <a:buFont typeface="Arial" panose="020B0604020202020204" pitchFamily="34" charset="0"/>
+              <a:buChar char="•"/>
+              <a:defRPr sz="1800" kern="1200">
+                <a:solidFill>
+                  <a:schemeClr val="lt1"/>
+                </a:solidFill>
+                <a:latin typeface="+mn-lt"/>
+                <a:ea typeface="+mn-ea"/>
+                <a:cs typeface="+mn-cs"/>
+              </a:defRPr>
+            </a:lvl8pPr>
+            <a:lvl9pPr marL="3886200" indent="-228600" algn="l" defTabSz="914400" rtl="0" eaLnBrk="1" latinLnBrk="0" hangingPunct="1">
+              <a:lnSpc>
+                <a:spcPct val="90000"/>
+              </a:lnSpc>
+              <a:spcBef>
+                <a:spcPts val="500"/>
+              </a:spcBef>
+              <a:buFont typeface="Arial" panose="020B0604020202020204" pitchFamily="34" charset="0"/>
+              <a:buChar char="•"/>
+              <a:defRPr sz="1800" kern="1200">
+                <a:solidFill>
+                  <a:schemeClr val="lt1"/>
+                </a:solidFill>
+                <a:latin typeface="+mn-lt"/>
+                <a:ea typeface="+mn-ea"/>
+                <a:cs typeface="+mn-cs"/>
+              </a:defRPr>
+            </a:lvl9pPr>
+          </a:lstStyle>
+          <a:p>
+            <a:pPr algn="ctr"/>
+            <a:r>
+              <a:rPr lang="en-US" sz="2000" dirty="0"/>
+              <a:t>TAX</a:t>
+            </a:r>
+          </a:p>
+        </p:txBody>
+      </p:sp>
+      <p:cxnSp>
+        <p:nvCxnSpPr>
+          <p:cNvPr id="72" name="Straight Connector 71">
+            <a:extLst>
+              <a:ext uri="{FF2B5EF4-FFF2-40B4-BE49-F238E27FC236}">
+                <a16:creationId xmlns:a16="http://schemas.microsoft.com/office/drawing/2014/main" id="{E799FE58-17B3-43CE-7F6B-D25E09C22304}"/>
+              </a:ext>
+            </a:extLst>
+          </p:cNvPr>
+          <p:cNvCxnSpPr>
+            <a:cxnSpLocks/>
+            <a:stCxn id="9" idx="1"/>
+            <a:endCxn id="70" idx="4"/>
+          </p:cNvCxnSpPr>
+          <p:nvPr/>
+        </p:nvCxnSpPr>
+        <p:spPr>
+          <a:xfrm flipH="1" flipV="1">
+            <a:off x="5505145" y="1598005"/>
+            <a:ext cx="869848" cy="775946"/>
+          </a:xfrm>
+          <a:prstGeom prst="line">
+            <a:avLst/>
+          </a:prstGeom>
+        </p:spPr>
+        <p:style>
+          <a:lnRef idx="1">
+            <a:schemeClr val="accent2"/>
+          </a:lnRef>
+          <a:fillRef idx="0">
+            <a:schemeClr val="accent2"/>
+          </a:fillRef>
+          <a:effectRef idx="0">
+            <a:schemeClr val="accent2"/>
+          </a:effectRef>
+          <a:fontRef idx="minor">
+            <a:schemeClr val="tx1"/>
+          </a:fontRef>
+        </p:style>
+      </p:cxnSp>
+      <p:cxnSp>
+        <p:nvCxnSpPr>
+          <p:cNvPr id="103" name="Straight Arrow Connector 102">
+            <a:extLst>
+              <a:ext uri="{FF2B5EF4-FFF2-40B4-BE49-F238E27FC236}">
+                <a16:creationId xmlns:a16="http://schemas.microsoft.com/office/drawing/2014/main" id="{7563D9B2-DF4C-BACB-39D0-B278D6728E2A}"/>
+              </a:ext>
+            </a:extLst>
+          </p:cNvPr>
+          <p:cNvCxnSpPr>
+            <a:cxnSpLocks/>
+            <a:stCxn id="7" idx="1"/>
+            <a:endCxn id="9" idx="2"/>
+          </p:cNvCxnSpPr>
+          <p:nvPr/>
+        </p:nvCxnSpPr>
+        <p:spPr>
+          <a:xfrm flipV="1">
+            <a:off x="3724891" y="3131582"/>
+            <a:ext cx="1786706" cy="3302615"/>
+          </a:xfrm>
+          <a:prstGeom prst="straightConnector1">
+            <a:avLst/>
+          </a:prstGeom>
+          <a:ln>
+            <a:tailEnd type="triangle"/>
+          </a:ln>
+        </p:spPr>
+        <p:style>
+          <a:lnRef idx="1">
+            <a:schemeClr val="accent1"/>
+          </a:lnRef>
+          <a:fillRef idx="0">
+            <a:schemeClr val="accent1"/>
+          </a:fillRef>
+          <a:effectRef idx="0">
+            <a:schemeClr val="accent1"/>
+          </a:effectRef>
+          <a:fontRef idx="minor">
+            <a:schemeClr val="tx1"/>
+          </a:fontRef>
+        </p:style>
+      </p:cxnSp>
+      <p:sp>
+        <p:nvSpPr>
+          <p:cNvPr id="120" name="Pentagon 119">
+            <a:extLst>
+              <a:ext uri="{FF2B5EF4-FFF2-40B4-BE49-F238E27FC236}">
+                <a16:creationId xmlns:a16="http://schemas.microsoft.com/office/drawing/2014/main" id="{C09EAEA0-3784-6FDC-90F3-C3EE8E444318}"/>
+              </a:ext>
+            </a:extLst>
+          </p:cNvPr>
+          <p:cNvSpPr/>
+          <p:nvPr/>
+        </p:nvSpPr>
+        <p:spPr>
+          <a:xfrm>
+            <a:off x="8307024" y="4984099"/>
+            <a:ext cx="2123768" cy="1508776"/>
+          </a:xfrm>
+          <a:prstGeom prst="pentagon">
+            <a:avLst/>
+          </a:prstGeom>
+        </p:spPr>
+        <p:style>
+          <a:lnRef idx="2">
+            <a:schemeClr val="accent6">
+              <a:shade val="15000"/>
+            </a:schemeClr>
+          </a:lnRef>
+          <a:fillRef idx="1">
+            <a:schemeClr val="accent6"/>
+          </a:fillRef>
+          <a:effectRef idx="0">
+            <a:schemeClr val="accent6"/>
+          </a:effectRef>
+          <a:fontRef idx="minor">
+            <a:schemeClr val="lt1"/>
+          </a:fontRef>
+        </p:style>
+        <p:txBody>
+          <a:bodyPr rtlCol="0" anchor="ctr"/>
+          <a:lstStyle/>
+          <a:p>
+            <a:pPr algn="ctr"/>
             <a:r>
               <a:rPr lang="en-US" dirty="0"/>
-              <a:t>Transactions - Tax etc.</a:t>
-            </a:r>
-          </a:p>
-        </p:txBody>
-      </p:sp>
+              <a:t>Potential Profit for ***</a:t>
+            </a:r>
+          </a:p>
+        </p:txBody>
+      </p:sp>
+      <p:cxnSp>
+        <p:nvCxnSpPr>
+          <p:cNvPr id="121" name="Straight Arrow Connector 120">
+            <a:extLst>
+              <a:ext uri="{FF2B5EF4-FFF2-40B4-BE49-F238E27FC236}">
+                <a16:creationId xmlns:a16="http://schemas.microsoft.com/office/drawing/2014/main" id="{48931939-4EB1-B9ED-23B8-7F19C7AD170B}"/>
+              </a:ext>
+            </a:extLst>
+          </p:cNvPr>
+          <p:cNvCxnSpPr>
+            <a:cxnSpLocks/>
+            <a:stCxn id="9" idx="4"/>
+            <a:endCxn id="120" idx="0"/>
+          </p:cNvCxnSpPr>
+          <p:nvPr/>
+        </p:nvCxnSpPr>
+        <p:spPr>
+          <a:xfrm>
+            <a:off x="7238388" y="3131582"/>
+            <a:ext cx="2130520" cy="1852517"/>
+          </a:xfrm>
+          <a:prstGeom prst="straightConnector1">
+            <a:avLst/>
+          </a:prstGeom>
+          <a:ln>
+            <a:tailEnd type="triangle"/>
+          </a:ln>
+        </p:spPr>
+        <p:style>
+          <a:lnRef idx="1">
+            <a:schemeClr val="accent6"/>
+          </a:lnRef>
+          <a:fillRef idx="0">
+            <a:schemeClr val="accent6"/>
+          </a:fillRef>
+          <a:effectRef idx="0">
+            <a:schemeClr val="accent6"/>
+          </a:effectRef>
+          <a:fontRef idx="minor">
+            <a:schemeClr val="tx1"/>
+          </a:fontRef>
+        </p:style>
+      </p:cxnSp>
+      <p:cxnSp>
+        <p:nvCxnSpPr>
+          <p:cNvPr id="124" name="Straight Arrow Connector 123">
+            <a:extLst>
+              <a:ext uri="{FF2B5EF4-FFF2-40B4-BE49-F238E27FC236}">
+                <a16:creationId xmlns:a16="http://schemas.microsoft.com/office/drawing/2014/main" id="{EB3B698F-D660-FA6A-D14F-F47EBFB1DB97}"/>
+              </a:ext>
+            </a:extLst>
+          </p:cNvPr>
+          <p:cNvCxnSpPr>
+            <a:cxnSpLocks/>
+            <a:stCxn id="9" idx="4"/>
+            <a:endCxn id="127" idx="0"/>
+          </p:cNvCxnSpPr>
+          <p:nvPr/>
+        </p:nvCxnSpPr>
+        <p:spPr>
+          <a:xfrm flipH="1">
+            <a:off x="7099815" y="3131582"/>
+            <a:ext cx="138573" cy="2083255"/>
+          </a:xfrm>
+          <a:prstGeom prst="straightConnector1">
+            <a:avLst/>
+          </a:prstGeom>
+          <a:ln>
+            <a:tailEnd type="triangle"/>
+          </a:ln>
+        </p:spPr>
+        <p:style>
+          <a:lnRef idx="1">
+            <a:schemeClr val="accent6"/>
+          </a:lnRef>
+          <a:fillRef idx="0">
+            <a:schemeClr val="accent6"/>
+          </a:fillRef>
+          <a:effectRef idx="0">
+            <a:schemeClr val="accent6"/>
+          </a:effectRef>
+          <a:fontRef idx="minor">
+            <a:schemeClr val="tx1"/>
+          </a:fontRef>
+        </p:style>
+      </p:cxnSp>
+      <p:sp>
+        <p:nvSpPr>
+          <p:cNvPr id="127" name="Pentagon 126">
+            <a:extLst>
+              <a:ext uri="{FF2B5EF4-FFF2-40B4-BE49-F238E27FC236}">
+                <a16:creationId xmlns:a16="http://schemas.microsoft.com/office/drawing/2014/main" id="{83ADE447-2E74-31B5-0918-966721AF069A}"/>
+              </a:ext>
+            </a:extLst>
+          </p:cNvPr>
+          <p:cNvSpPr/>
+          <p:nvPr/>
+        </p:nvSpPr>
+        <p:spPr>
+          <a:xfrm>
+            <a:off x="6037931" y="5214837"/>
+            <a:ext cx="2123768" cy="1508776"/>
+          </a:xfrm>
+          <a:prstGeom prst="pentagon">
+            <a:avLst/>
+          </a:prstGeom>
+        </p:spPr>
+        <p:style>
+          <a:lnRef idx="2">
+            <a:schemeClr val="accent6">
+              <a:shade val="15000"/>
+            </a:schemeClr>
+          </a:lnRef>
+          <a:fillRef idx="1">
+            <a:schemeClr val="accent6"/>
+          </a:fillRef>
+          <a:effectRef idx="0">
+            <a:schemeClr val="accent6"/>
+          </a:effectRef>
+          <a:fontRef idx="minor">
+            <a:schemeClr val="lt1"/>
+          </a:fontRef>
+        </p:style>
+        <p:txBody>
+          <a:bodyPr rtlCol="0" anchor="ctr"/>
+          <a:lstStyle/>
+          <a:p>
+            <a:pPr algn="ctr"/>
+            <a:r>
+              <a:rPr lang="en-US" dirty="0"/>
+              <a:t>Max Bid Price for ***</a:t>
+            </a:r>
+          </a:p>
+        </p:txBody>
+      </p:sp>
+      <p:sp>
+        <p:nvSpPr>
+          <p:cNvPr id="131" name="Pentagon 130">
+            <a:extLst>
+              <a:ext uri="{FF2B5EF4-FFF2-40B4-BE49-F238E27FC236}">
+                <a16:creationId xmlns:a16="http://schemas.microsoft.com/office/drawing/2014/main" id="{974C5B5C-92BB-AD65-F1C0-139254C0571E}"/>
+              </a:ext>
+            </a:extLst>
+          </p:cNvPr>
+          <p:cNvSpPr/>
+          <p:nvPr/>
+        </p:nvSpPr>
+        <p:spPr>
+          <a:xfrm>
+            <a:off x="6993660" y="3634691"/>
+            <a:ext cx="2278158" cy="1508776"/>
+          </a:xfrm>
+          <a:prstGeom prst="pentagon">
+            <a:avLst/>
+          </a:prstGeom>
+        </p:spPr>
+        <p:style>
+          <a:lnRef idx="2">
+            <a:schemeClr val="accent6">
+              <a:shade val="15000"/>
+            </a:schemeClr>
+          </a:lnRef>
+          <a:fillRef idx="1">
+            <a:schemeClr val="accent6"/>
+          </a:fillRef>
+          <a:effectRef idx="0">
+            <a:schemeClr val="accent6"/>
+          </a:effectRef>
+          <a:fontRef idx="minor">
+            <a:schemeClr val="lt1"/>
+          </a:fontRef>
+        </p:style>
+        <p:txBody>
+          <a:bodyPr rtlCol="0" anchor="ctr"/>
+          <a:lstStyle/>
+          <a:p>
+            <a:pPr algn="ctr"/>
+            <a:r>
+              <a:rPr lang="en-US" dirty="0"/>
+              <a:t>Inferences from done transactions (i.e. TAX)</a:t>
+            </a:r>
+          </a:p>
+        </p:txBody>
+      </p:sp>
+      <p:cxnSp>
+        <p:nvCxnSpPr>
+          <p:cNvPr id="132" name="Straight Arrow Connector 131">
+            <a:extLst>
+              <a:ext uri="{FF2B5EF4-FFF2-40B4-BE49-F238E27FC236}">
+                <a16:creationId xmlns:a16="http://schemas.microsoft.com/office/drawing/2014/main" id="{E76CB961-4277-F830-8539-ABA29A1F1502}"/>
+              </a:ext>
+            </a:extLst>
+          </p:cNvPr>
+          <p:cNvCxnSpPr>
+            <a:cxnSpLocks/>
+            <a:stCxn id="9" idx="4"/>
+            <a:endCxn id="131" idx="0"/>
+          </p:cNvCxnSpPr>
+          <p:nvPr/>
+        </p:nvCxnSpPr>
+        <p:spPr>
+          <a:xfrm>
+            <a:off x="7238388" y="3131582"/>
+            <a:ext cx="894351" cy="503109"/>
+          </a:xfrm>
+          <a:prstGeom prst="straightConnector1">
+            <a:avLst/>
+          </a:prstGeom>
+          <a:ln>
+            <a:tailEnd type="triangle"/>
+          </a:ln>
+        </p:spPr>
+        <p:style>
+          <a:lnRef idx="1">
+            <a:schemeClr val="accent6"/>
+          </a:lnRef>
+          <a:fillRef idx="0">
+            <a:schemeClr val="accent6"/>
+          </a:fillRef>
+          <a:effectRef idx="0">
+            <a:schemeClr val="accent6"/>
+          </a:effectRef>
+          <a:fontRef idx="minor">
+            <a:schemeClr val="tx1"/>
+          </a:fontRef>
+        </p:style>
+      </p:cxnSp>
+      <p:sp>
+        <p:nvSpPr>
+          <p:cNvPr id="136" name="Rectangle: Rounded Corners 135">
+            <a:extLst>
+              <a:ext uri="{FF2B5EF4-FFF2-40B4-BE49-F238E27FC236}">
+                <a16:creationId xmlns:a16="http://schemas.microsoft.com/office/drawing/2014/main" id="{29F72AF3-C0F6-ACB7-A58D-05EC61298DD4}"/>
+              </a:ext>
+            </a:extLst>
+          </p:cNvPr>
+          <p:cNvSpPr/>
+          <p:nvPr/>
+        </p:nvSpPr>
+        <p:spPr>
+          <a:xfrm>
+            <a:off x="3078003" y="888775"/>
+            <a:ext cx="1120878" cy="899785"/>
+          </a:xfrm>
+          <a:prstGeom prst="roundRect">
+            <a:avLst/>
+          </a:prstGeom>
+        </p:spPr>
+        <p:style>
+          <a:lnRef idx="2">
+            <a:schemeClr val="accent1">
+              <a:shade val="15000"/>
+            </a:schemeClr>
+          </a:lnRef>
+          <a:fillRef idx="1">
+            <a:schemeClr val="accent1"/>
+          </a:fillRef>
+          <a:effectRef idx="0">
+            <a:schemeClr val="accent1"/>
+          </a:effectRef>
+          <a:fontRef idx="minor">
+            <a:schemeClr val="lt1"/>
+          </a:fontRef>
+        </p:style>
+        <p:txBody>
+          <a:bodyPr rtlCol="0" anchor="ctr"/>
+          <a:lstStyle/>
+          <a:p>
+            <a:pPr algn="ctr"/>
+            <a:r>
+              <a:rPr lang="en-US" dirty="0" err="1"/>
+              <a:t>DoValue</a:t>
+            </a:r>
+            <a:endParaRPr lang="en-US" dirty="0"/>
+          </a:p>
+        </p:txBody>
+      </p:sp>
+      <p:cxnSp>
+        <p:nvCxnSpPr>
+          <p:cNvPr id="137" name="Straight Arrow Connector 136">
+            <a:extLst>
+              <a:ext uri="{FF2B5EF4-FFF2-40B4-BE49-F238E27FC236}">
+                <a16:creationId xmlns:a16="http://schemas.microsoft.com/office/drawing/2014/main" id="{682ADE66-1222-BB6E-28E9-8891E4063771}"/>
+              </a:ext>
+            </a:extLst>
+          </p:cNvPr>
+          <p:cNvCxnSpPr>
+            <a:cxnSpLocks/>
+            <a:stCxn id="136" idx="2"/>
+          </p:cNvCxnSpPr>
+          <p:nvPr/>
+        </p:nvCxnSpPr>
+        <p:spPr>
+          <a:xfrm>
+            <a:off x="3638442" y="1788560"/>
+            <a:ext cx="2025555" cy="1495422"/>
+          </a:xfrm>
+          <a:prstGeom prst="straightConnector1">
+            <a:avLst/>
+          </a:prstGeom>
+          <a:ln>
+            <a:tailEnd type="triangle"/>
+          </a:ln>
+        </p:spPr>
+        <p:style>
+          <a:lnRef idx="1">
+            <a:schemeClr val="accent1"/>
+          </a:lnRef>
+          <a:fillRef idx="0">
+            <a:schemeClr val="accent1"/>
+          </a:fillRef>
+          <a:effectRef idx="0">
+            <a:schemeClr val="accent1"/>
+          </a:effectRef>
+          <a:fontRef idx="minor">
+            <a:schemeClr val="tx1"/>
+          </a:fontRef>
+        </p:style>
+      </p:cxnSp>
     </p:spTree>
     <p:extLst>
       <p:ext uri="{BB962C8B-B14F-4D97-AF65-F5344CB8AC3E}">
@@ -4416,7 +5660,7 @@
           <p:cNvPr id="2" name="Title 1">
             <a:extLst>
               <a:ext uri="{FF2B5EF4-FFF2-40B4-BE49-F238E27FC236}">
-                <a16:creationId xmlns:a16="http://schemas.microsoft.com/office/drawing/2014/main" id="{725322BF-AE3A-50A6-79AB-4D7A8A683220}"/>
+                <a16:creationId xmlns:a16="http://schemas.microsoft.com/office/drawing/2014/main" id="{46D40967-ED58-9B4A-BD71-F93931014FD8}"/>
               </a:ext>
             </a:extLst>
           </p:cNvPr>
@@ -4434,17 +5678,17 @@
           <a:p>
             <a:r>
               <a:rPr lang="en-US" dirty="0"/>
-              <a:t> </a:t>
-            </a:r>
-          </a:p>
-        </p:txBody>
-      </p:sp>
-      <p:sp>
-        <p:nvSpPr>
-          <p:cNvPr id="4" name="Content Placeholder 5">
-            <a:extLst>
-              <a:ext uri="{FF2B5EF4-FFF2-40B4-BE49-F238E27FC236}">
-                <a16:creationId xmlns:a16="http://schemas.microsoft.com/office/drawing/2014/main" id="{BFB9858A-8FA2-EBC0-FC78-23CCD34E9B19}"/>
+              <a:t>Developing Progress	</a:t>
+            </a:r>
+          </a:p>
+        </p:txBody>
+      </p:sp>
+      <p:sp>
+        <p:nvSpPr>
+          <p:cNvPr id="3" name="Content Placeholder 2">
+            <a:extLst>
+              <a:ext uri="{FF2B5EF4-FFF2-40B4-BE49-F238E27FC236}">
+                <a16:creationId xmlns:a16="http://schemas.microsoft.com/office/drawing/2014/main" id="{95BBC072-A608-7B4D-BEF9-B0EA95478B1E}"/>
               </a:ext>
             </a:extLst>
           </p:cNvPr>
@@ -4455,12 +5699,206 @@
             <p:ph idx="1"/>
           </p:nvPr>
         </p:nvSpPr>
+        <p:spPr/>
+        <p:txBody>
+          <a:bodyPr>
+            <a:normAutofit lnSpcReduction="10000"/>
+          </a:bodyPr>
+          <a:lstStyle/>
+          <a:p>
+            <a:r>
+              <a:rPr lang="en-US" b="1" dirty="0"/>
+              <a:t>First thin yet full process built on great shield. Then enhancing.</a:t>
+            </a:r>
+          </a:p>
+          <a:p>
+            <a:r>
+              <a:rPr lang="en-US" dirty="0"/>
+              <a:t>Initializing PostgreSQL + </a:t>
+            </a:r>
+            <a:r>
+              <a:rPr lang="en-US" dirty="0" err="1"/>
+              <a:t>PostGIS</a:t>
+            </a:r>
+            <a:endParaRPr lang="en-US" dirty="0"/>
+          </a:p>
+          <a:p>
+            <a:r>
+              <a:rPr lang="en-US" dirty="0" err="1"/>
+              <a:t>Spitogatos</a:t>
+            </a:r>
+            <a:r>
+              <a:rPr lang="en-US" dirty="0"/>
+              <a:t> scraping</a:t>
+            </a:r>
+          </a:p>
+          <a:p>
+            <a:r>
+              <a:rPr lang="en-US" dirty="0" err="1"/>
+              <a:t>Dovalue</a:t>
+            </a:r>
+            <a:r>
+              <a:rPr lang="en-US" dirty="0"/>
+              <a:t> Excel converting</a:t>
+            </a:r>
+          </a:p>
+          <a:p>
+            <a:r>
+              <a:rPr lang="en-US" dirty="0"/>
+              <a:t>Revaluation inner process</a:t>
+            </a:r>
+          </a:p>
+          <a:p>
+            <a:r>
+              <a:rPr lang="en-US" dirty="0"/>
+              <a:t>Image processing process. Inserting its results into DB then to Revaluation Process</a:t>
+            </a:r>
+          </a:p>
+          <a:p>
+            <a:r>
+              <a:rPr lang="en-US" dirty="0"/>
+              <a:t>Api for output functions</a:t>
+            </a:r>
+          </a:p>
+          <a:p>
+            <a:r>
+              <a:rPr lang="en-US" dirty="0"/>
+              <a:t>Dashboard contains map, graphs and other inferences</a:t>
+            </a:r>
+          </a:p>
+          <a:p>
+            <a:endParaRPr lang="en-US" dirty="0"/>
+          </a:p>
+          <a:p>
+            <a:endParaRPr lang="en-US" dirty="0"/>
+          </a:p>
+          <a:p>
+            <a:endParaRPr lang="en-US" dirty="0"/>
+          </a:p>
+          <a:p>
+            <a:endParaRPr lang="en-US" dirty="0"/>
+          </a:p>
+          <a:p>
+            <a:endParaRPr lang="en-US" dirty="0"/>
+          </a:p>
+        </p:txBody>
+      </p:sp>
+      <p:sp>
+        <p:nvSpPr>
+          <p:cNvPr id="4" name="Rectangle: Rounded Corners 3">
+            <a:extLst>
+              <a:ext uri="{FF2B5EF4-FFF2-40B4-BE49-F238E27FC236}">
+                <a16:creationId xmlns:a16="http://schemas.microsoft.com/office/drawing/2014/main" id="{C413D853-0529-1E8E-0DF1-8C6F2F5D5F30}"/>
+              </a:ext>
+            </a:extLst>
+          </p:cNvPr>
+          <p:cNvSpPr/>
+          <p:nvPr/>
+        </p:nvSpPr>
         <p:spPr>
-          <a:xfrm>
-            <a:off x="415413" y="1690688"/>
-            <a:ext cx="3271684" cy="2106408"/>
+          <a:xfrm rot="343773">
+            <a:off x="5043948" y="2713703"/>
+            <a:ext cx="1602658" cy="530942"/>
           </a:xfrm>
-          <a:prstGeom prst="cloud">
+          <a:prstGeom prst="roundRect">
+            <a:avLst/>
+          </a:prstGeom>
+        </p:spPr>
+        <p:style>
+          <a:lnRef idx="2">
+            <a:schemeClr val="accent4">
+              <a:shade val="15000"/>
+            </a:schemeClr>
+          </a:lnRef>
+          <a:fillRef idx="1">
+            <a:schemeClr val="accent4"/>
+          </a:fillRef>
+          <a:effectRef idx="0">
+            <a:schemeClr val="accent4"/>
+          </a:effectRef>
+          <a:fontRef idx="minor">
+            <a:schemeClr val="lt1"/>
+          </a:fontRef>
+        </p:style>
+        <p:txBody>
+          <a:bodyPr rtlCol="0" anchor="ctr"/>
+          <a:lstStyle/>
+          <a:p>
+            <a:pPr algn="ctr"/>
+            <a:r>
+              <a:rPr lang="en-US" dirty="0"/>
+              <a:t>8 hours</a:t>
+            </a:r>
+          </a:p>
+        </p:txBody>
+      </p:sp>
+      <p:sp>
+        <p:nvSpPr>
+          <p:cNvPr id="5" name="Rectangle: Rounded Corners 4">
+            <a:extLst>
+              <a:ext uri="{FF2B5EF4-FFF2-40B4-BE49-F238E27FC236}">
+                <a16:creationId xmlns:a16="http://schemas.microsoft.com/office/drawing/2014/main" id="{EC92F35F-5221-9731-AA87-D169EF0297A4}"/>
+              </a:ext>
+            </a:extLst>
+          </p:cNvPr>
+          <p:cNvSpPr/>
+          <p:nvPr/>
+        </p:nvSpPr>
+        <p:spPr>
+          <a:xfrm rot="343773">
+            <a:off x="6995651" y="2182761"/>
+            <a:ext cx="1602658" cy="530942"/>
+          </a:xfrm>
+          <a:prstGeom prst="roundRect">
+            <a:avLst/>
+          </a:prstGeom>
+        </p:spPr>
+        <p:style>
+          <a:lnRef idx="2">
+            <a:schemeClr val="accent6">
+              <a:shade val="15000"/>
+            </a:schemeClr>
+          </a:lnRef>
+          <a:fillRef idx="1">
+            <a:schemeClr val="accent6"/>
+          </a:fillRef>
+          <a:effectRef idx="0">
+            <a:schemeClr val="accent6"/>
+          </a:effectRef>
+          <a:fontRef idx="minor">
+            <a:schemeClr val="lt1"/>
+          </a:fontRef>
+        </p:style>
+        <p:txBody>
+          <a:bodyPr rtlCol="0" anchor="ctr"/>
+          <a:lstStyle/>
+          <a:p>
+            <a:pPr algn="ctr"/>
+            <a:r>
+              <a:rPr lang="en-US" dirty="0"/>
+              <a:t>8 hours</a:t>
+            </a:r>
+          </a:p>
+        </p:txBody>
+      </p:sp>
+      <p:sp>
+        <p:nvSpPr>
+          <p:cNvPr id="6" name="Rectangle: Rounded Corners 5">
+            <a:extLst>
+              <a:ext uri="{FF2B5EF4-FFF2-40B4-BE49-F238E27FC236}">
+                <a16:creationId xmlns:a16="http://schemas.microsoft.com/office/drawing/2014/main" id="{864F15EA-06E1-EB31-D57D-5D1DF1982A6E}"/>
+              </a:ext>
+            </a:extLst>
+          </p:cNvPr>
+          <p:cNvSpPr/>
+          <p:nvPr/>
+        </p:nvSpPr>
+        <p:spPr>
+          <a:xfrm rot="343773">
+            <a:off x="6833042" y="3207375"/>
+            <a:ext cx="1602658" cy="530942"/>
+          </a:xfrm>
+          <a:prstGeom prst="roundRect">
             <a:avLst/>
           </a:prstGeom>
         </p:spPr>
@@ -4486,19 +5924,18 @@
           <a:p>
             <a:pPr algn="ctr"/>
             <a:r>
-              <a:rPr lang="en-US" dirty="0" err="1"/>
-              <a:t>Spitogatos</a:t>
-            </a:r>
-            <a:endParaRPr lang="en-US" dirty="0"/>
-          </a:p>
-        </p:txBody>
-      </p:sp>
-      <p:sp>
-        <p:nvSpPr>
-          <p:cNvPr id="5" name="Arrow: Down 4">
-            <a:extLst>
-              <a:ext uri="{FF2B5EF4-FFF2-40B4-BE49-F238E27FC236}">
-                <a16:creationId xmlns:a16="http://schemas.microsoft.com/office/drawing/2014/main" id="{155DA859-682B-5AD4-E0DA-5EEBDFF28D66}"/>
+              <a:rPr lang="en-US" dirty="0"/>
+              <a:t>2 hours</a:t>
+            </a:r>
+          </a:p>
+        </p:txBody>
+      </p:sp>
+      <p:sp>
+        <p:nvSpPr>
+          <p:cNvPr id="7" name="Rectangle: Rounded Corners 6">
+            <a:extLst>
+              <a:ext uri="{FF2B5EF4-FFF2-40B4-BE49-F238E27FC236}">
+                <a16:creationId xmlns:a16="http://schemas.microsoft.com/office/drawing/2014/main" id="{8EC0F7BE-C79F-2282-849C-12E57B7E14B8}"/>
               </a:ext>
             </a:extLst>
           </p:cNvPr>
@@ -4506,11 +5943,60 @@
           <p:nvPr/>
         </p:nvSpPr>
         <p:spPr>
-          <a:xfrm>
-            <a:off x="1455174" y="3539613"/>
-            <a:ext cx="442451" cy="1199535"/>
+          <a:xfrm rot="343773">
+            <a:off x="5191432" y="3601781"/>
+            <a:ext cx="1602658" cy="530942"/>
           </a:xfrm>
-          <a:prstGeom prst="downArrow">
+          <a:prstGeom prst="roundRect">
+            <a:avLst/>
+          </a:prstGeom>
+        </p:spPr>
+        <p:style>
+          <a:lnRef idx="2">
+            <a:schemeClr val="accent4">
+              <a:shade val="15000"/>
+            </a:schemeClr>
+          </a:lnRef>
+          <a:fillRef idx="1">
+            <a:schemeClr val="accent4"/>
+          </a:fillRef>
+          <a:effectRef idx="0">
+            <a:schemeClr val="accent4"/>
+          </a:effectRef>
+          <a:fontRef idx="minor">
+            <a:schemeClr val="lt1"/>
+          </a:fontRef>
+        </p:style>
+        <p:txBody>
+          <a:bodyPr rtlCol="0" anchor="ctr"/>
+          <a:lstStyle/>
+          <a:p>
+            <a:pPr algn="ctr"/>
+            <a:r>
+              <a:rPr lang="en-US" dirty="0"/>
+              <a:t>4 hours</a:t>
+            </a:r>
+          </a:p>
+        </p:txBody>
+      </p:sp>
+      <p:sp>
+        <p:nvSpPr>
+          <p:cNvPr id="8" name="Rectangle: Rounded Corners 7">
+            <a:extLst>
+              <a:ext uri="{FF2B5EF4-FFF2-40B4-BE49-F238E27FC236}">
+                <a16:creationId xmlns:a16="http://schemas.microsoft.com/office/drawing/2014/main" id="{56A2197C-BA07-C779-9FF6-16C3ED771A0C}"/>
+              </a:ext>
+            </a:extLst>
+          </p:cNvPr>
+          <p:cNvSpPr/>
+          <p:nvPr/>
+        </p:nvSpPr>
+        <p:spPr>
+          <a:xfrm rot="343773">
+            <a:off x="10122309" y="4132723"/>
+            <a:ext cx="1602658" cy="530942"/>
+          </a:xfrm>
+          <a:prstGeom prst="roundRect">
             <a:avLst/>
           </a:prstGeom>
         </p:spPr>
@@ -4535,14 +6021,115 @@
           <a:lstStyle/>
           <a:p>
             <a:pPr algn="ctr"/>
-            <a:endParaRPr lang="en-US"/>
+            <a:r>
+              <a:rPr lang="en-US" dirty="0"/>
+              <a:t>16 hours</a:t>
+            </a:r>
+          </a:p>
+        </p:txBody>
+      </p:sp>
+      <p:sp>
+        <p:nvSpPr>
+          <p:cNvPr id="9" name="Rectangle: Rounded Corners 8">
+            <a:extLst>
+              <a:ext uri="{FF2B5EF4-FFF2-40B4-BE49-F238E27FC236}">
+                <a16:creationId xmlns:a16="http://schemas.microsoft.com/office/drawing/2014/main" id="{5D1309A9-771B-E028-FDC0-A3821B1DD810}"/>
+              </a:ext>
+            </a:extLst>
+          </p:cNvPr>
+          <p:cNvSpPr/>
+          <p:nvPr/>
+        </p:nvSpPr>
+        <p:spPr>
+          <a:xfrm rot="343773">
+            <a:off x="4916128" y="4872882"/>
+            <a:ext cx="1602658" cy="530942"/>
+          </a:xfrm>
+          <a:prstGeom prst="roundRect">
+            <a:avLst/>
+          </a:prstGeom>
+        </p:spPr>
+        <p:style>
+          <a:lnRef idx="2">
+            <a:schemeClr val="accent1">
+              <a:shade val="15000"/>
+            </a:schemeClr>
+          </a:lnRef>
+          <a:fillRef idx="1">
+            <a:schemeClr val="accent1"/>
+          </a:fillRef>
+          <a:effectRef idx="0">
+            <a:schemeClr val="accent1"/>
+          </a:effectRef>
+          <a:fontRef idx="minor">
+            <a:schemeClr val="lt1"/>
+          </a:fontRef>
+        </p:style>
+        <p:txBody>
+          <a:bodyPr rtlCol="0" anchor="ctr"/>
+          <a:lstStyle/>
+          <a:p>
+            <a:pPr algn="ctr"/>
+            <a:r>
+              <a:rPr lang="en-US" dirty="0"/>
+              <a:t>8 hours</a:t>
+            </a:r>
+          </a:p>
+        </p:txBody>
+      </p:sp>
+      <p:sp>
+        <p:nvSpPr>
+          <p:cNvPr id="10" name="Rectangle: Rounded Corners 9">
+            <a:extLst>
+              <a:ext uri="{FF2B5EF4-FFF2-40B4-BE49-F238E27FC236}">
+                <a16:creationId xmlns:a16="http://schemas.microsoft.com/office/drawing/2014/main" id="{92AB57C5-4AF7-CB71-6B5F-8C8E25AF58AD}"/>
+              </a:ext>
+            </a:extLst>
+          </p:cNvPr>
+          <p:cNvSpPr/>
+          <p:nvPr/>
+        </p:nvSpPr>
+        <p:spPr>
+          <a:xfrm rot="343773">
+            <a:off x="9135397" y="5403824"/>
+            <a:ext cx="1602658" cy="530942"/>
+          </a:xfrm>
+          <a:prstGeom prst="roundRect">
+            <a:avLst/>
+          </a:prstGeom>
+        </p:spPr>
+        <p:style>
+          <a:lnRef idx="2">
+            <a:schemeClr val="accent1">
+              <a:shade val="15000"/>
+            </a:schemeClr>
+          </a:lnRef>
+          <a:fillRef idx="1">
+            <a:schemeClr val="accent1"/>
+          </a:fillRef>
+          <a:effectRef idx="0">
+            <a:schemeClr val="accent1"/>
+          </a:effectRef>
+          <a:fontRef idx="minor">
+            <a:schemeClr val="lt1"/>
+          </a:fontRef>
+        </p:style>
+        <p:txBody>
+          <a:bodyPr rtlCol="0" anchor="ctr"/>
+          <a:lstStyle/>
+          <a:p>
+            <a:pPr algn="ctr"/>
+            <a:r>
+              <a:rPr lang="en-US" dirty="0"/>
+              <a:t>16 hours</a:t>
+            </a:r>
           </a:p>
         </p:txBody>
       </p:sp>
     </p:spTree>
     <p:extLst>
       <p:ext uri="{BB962C8B-B14F-4D97-AF65-F5344CB8AC3E}">
-        <p14:creationId xmlns:p14="http://schemas.microsoft.com/office/powerpoint/2010/main" val="293735490"/>
+        <p14:creationId xmlns:p14="http://schemas.microsoft.com/office/powerpoint/2010/main" val="895721892"/>
       </p:ext>
     </p:extLst>
   </p:cSld>
@@ -4574,7 +6161,7 @@
           <p:cNvPr id="2" name="Title 1">
             <a:extLst>
               <a:ext uri="{FF2B5EF4-FFF2-40B4-BE49-F238E27FC236}">
-                <a16:creationId xmlns:a16="http://schemas.microsoft.com/office/drawing/2014/main" id="{335358B3-B04C-166C-8AA9-9C0AEF2E20F1}"/>
+                <a16:creationId xmlns:a16="http://schemas.microsoft.com/office/drawing/2014/main" id="{7FC73E06-6B70-345B-AA9F-DB9AF881D9F2}"/>
               </a:ext>
             </a:extLst>
           </p:cNvPr>
@@ -4592,159 +6179,40 @@
           <a:p>
             <a:r>
               <a:rPr lang="en-US" dirty="0"/>
-              <a:t>Model</a:t>
-            </a:r>
-          </a:p>
-        </p:txBody>
-      </p:sp>
-      <p:sp>
-        <p:nvSpPr>
-          <p:cNvPr id="4" name="Rectangle 3">
-            <a:extLst>
-              <a:ext uri="{FF2B5EF4-FFF2-40B4-BE49-F238E27FC236}">
-                <a16:creationId xmlns:a16="http://schemas.microsoft.com/office/drawing/2014/main" id="{FF19B990-DD98-5B6F-6230-77D66AF7F31B}"/>
-              </a:ext>
-            </a:extLst>
-          </p:cNvPr>
-          <p:cNvSpPr/>
-          <p:nvPr/>
-        </p:nvSpPr>
-        <p:spPr>
-          <a:xfrm>
-            <a:off x="639097" y="2104104"/>
-            <a:ext cx="3519948" cy="4208206"/>
-          </a:xfrm>
-          <a:prstGeom prst="rect">
-            <a:avLst/>
-          </a:prstGeom>
-        </p:spPr>
-        <p:style>
-          <a:lnRef idx="2">
-            <a:schemeClr val="accent1">
-              <a:shade val="15000"/>
-            </a:schemeClr>
-          </a:lnRef>
-          <a:fillRef idx="1">
-            <a:schemeClr val="accent1"/>
-          </a:fillRef>
-          <a:effectRef idx="0">
-            <a:schemeClr val="accent1"/>
-          </a:effectRef>
-          <a:fontRef idx="minor">
-            <a:schemeClr val="lt1"/>
-          </a:fontRef>
-        </p:style>
-        <p:txBody>
-          <a:bodyPr rtlCol="0" anchor="ctr"/>
-          <a:lstStyle/>
-          <a:p>
-            <a:pPr algn="ctr"/>
-            <a:r>
-              <a:rPr lang="en-US" b="1" dirty="0"/>
-              <a:t>Asset:</a:t>
-            </a:r>
-          </a:p>
-          <a:p>
-            <a:pPr algn="ctr"/>
-            <a:r>
-              <a:rPr lang="en-US" dirty="0"/>
-              <a:t>Location</a:t>
-            </a:r>
-          </a:p>
-          <a:p>
-            <a:pPr algn="ctr"/>
-            <a:r>
-              <a:rPr lang="en-US" dirty="0"/>
-              <a:t>ADDRESS</a:t>
-            </a:r>
-          </a:p>
-          <a:p>
-            <a:pPr algn="ctr"/>
-            <a:r>
-              <a:rPr lang="en-US" dirty="0"/>
-              <a:t>City, Municipality, etc.</a:t>
-            </a:r>
-          </a:p>
-          <a:p>
-            <a:pPr algn="ctr"/>
-            <a:r>
-              <a:rPr lang="en-US" dirty="0"/>
-              <a:t>Time</a:t>
-            </a:r>
-          </a:p>
-          <a:p>
-            <a:pPr algn="ctr"/>
-            <a:r>
-              <a:rPr lang="en-US" dirty="0"/>
-              <a:t>Sqm</a:t>
-            </a:r>
-          </a:p>
-          <a:p>
-            <a:pPr algn="ctr"/>
-            <a:r>
-              <a:rPr lang="en-US" dirty="0"/>
-              <a:t>Price</a:t>
-            </a:r>
-          </a:p>
-          <a:p>
-            <a:pPr algn="ctr"/>
-            <a:r>
-              <a:rPr lang="en-US" dirty="0"/>
-              <a:t>Year</a:t>
-            </a:r>
-          </a:p>
-          <a:p>
-            <a:pPr algn="ctr"/>
-            <a:r>
-              <a:rPr lang="en-US" dirty="0"/>
-              <a:t>Level</a:t>
-            </a:r>
-          </a:p>
-          <a:p>
-            <a:pPr algn="ctr"/>
-            <a:r>
-              <a:rPr lang="en-US" dirty="0"/>
-              <a:t>Source URL</a:t>
-            </a:r>
-          </a:p>
-          <a:p>
-            <a:pPr algn="ctr"/>
-            <a:r>
-              <a:rPr lang="en-US" dirty="0"/>
-              <a:t>Revaluation Price</a:t>
-            </a:r>
-          </a:p>
-          <a:p>
-            <a:pPr algn="ctr"/>
-            <a:r>
-              <a:rPr lang="en-US" dirty="0"/>
-              <a:t>Revaluation Time</a:t>
-            </a:r>
-          </a:p>
-          <a:p>
-            <a:pPr algn="ctr"/>
-            <a:r>
-              <a:rPr lang="en-US" dirty="0"/>
-              <a:t>Photos</a:t>
-            </a:r>
-          </a:p>
-          <a:p>
-            <a:pPr algn="ctr"/>
-            <a:r>
-              <a:rPr lang="en-US" dirty="0"/>
-              <a:t>Description</a:t>
-            </a:r>
-          </a:p>
-          <a:p>
-            <a:pPr algn="ctr"/>
-            <a:endParaRPr lang="en-US" dirty="0"/>
+              <a:t>Some more Details:</a:t>
+            </a:r>
+          </a:p>
+        </p:txBody>
+      </p:sp>
+      <p:sp>
+        <p:nvSpPr>
+          <p:cNvPr id="3" name="Content Placeholder 2">
+            <a:extLst>
+              <a:ext uri="{FF2B5EF4-FFF2-40B4-BE49-F238E27FC236}">
+                <a16:creationId xmlns:a16="http://schemas.microsoft.com/office/drawing/2014/main" id="{B584220D-6BE3-941F-489E-33ABC4A21C9B}"/>
+              </a:ext>
+            </a:extLst>
+          </p:cNvPr>
+          <p:cNvSpPr>
+            <a:spLocks noGrp="1"/>
+          </p:cNvSpPr>
+          <p:nvPr>
+            <p:ph idx="1"/>
+          </p:nvPr>
+        </p:nvSpPr>
+        <p:spPr/>
+        <p:txBody>
+          <a:bodyPr/>
+          <a:lstStyle/>
+          <a:p>
+            <a:endParaRPr lang="en-US"/>
           </a:p>
         </p:txBody>
       </p:sp>
     </p:spTree>
     <p:extLst>
       <p:ext uri="{BB962C8B-B14F-4D97-AF65-F5344CB8AC3E}">
-        <p14:creationId xmlns:p14="http://schemas.microsoft.com/office/powerpoint/2010/main" val="694718240"/>
+        <p14:creationId xmlns:p14="http://schemas.microsoft.com/office/powerpoint/2010/main" val="708016631"/>
       </p:ext>
     </p:extLst>
   </p:cSld>
@@ -4776,7 +6244,7 @@
           <p:cNvPr id="2" name="Title 1">
             <a:extLst>
               <a:ext uri="{FF2B5EF4-FFF2-40B4-BE49-F238E27FC236}">
-                <a16:creationId xmlns:a16="http://schemas.microsoft.com/office/drawing/2014/main" id="{60CC2A28-635B-5356-FC74-EF1634BC24A8}"/>
+                <a16:creationId xmlns:a16="http://schemas.microsoft.com/office/drawing/2014/main" id="{834DAB46-0CC7-5182-99DE-B97DE2CB20C9}"/>
               </a:ext>
             </a:extLst>
           </p:cNvPr>
@@ -4790,14 +6258,191 @@
         <p:spPr/>
         <p:txBody>
           <a:bodyPr/>
+          <a:lstStyle/>
+          <a:p>
+            <a:r>
+              <a:rPr lang="en-US" dirty="0"/>
+              <a:t>DB: </a:t>
+            </a:r>
+            <a:r>
+              <a:rPr lang="en-US" dirty="0" err="1"/>
+              <a:t>PostGIS</a:t>
+            </a:r>
+            <a:r>
+              <a:rPr lang="en-US" dirty="0"/>
+              <a:t> + PostgreSQL</a:t>
+            </a:r>
+          </a:p>
+        </p:txBody>
+      </p:sp>
+      <p:sp>
+        <p:nvSpPr>
+          <p:cNvPr id="3" name="Content Placeholder 2">
+            <a:extLst>
+              <a:ext uri="{FF2B5EF4-FFF2-40B4-BE49-F238E27FC236}">
+                <a16:creationId xmlns:a16="http://schemas.microsoft.com/office/drawing/2014/main" id="{EE673EE9-6F7C-119D-910C-F5873E9BDA3C}"/>
+              </a:ext>
+            </a:extLst>
+          </p:cNvPr>
+          <p:cNvSpPr>
+            <a:spLocks noGrp="1"/>
+          </p:cNvSpPr>
+          <p:nvPr>
+            <p:ph idx="1"/>
+          </p:nvPr>
+        </p:nvSpPr>
+        <p:spPr/>
+        <p:txBody>
+          <a:bodyPr numCol="2"/>
           <a:lstStyle/>
           <a:p>
             <a:r>
               <a:rPr lang="en-US" dirty="0" err="1"/>
               <a:t>Spitogatos</a:t>
             </a:r>
+            <a:r>
+              <a:rPr lang="en-US" dirty="0"/>
+              <a:t> Assets</a:t>
+            </a:r>
+          </a:p>
+          <a:p>
+            <a:r>
+              <a:rPr lang="en-US" dirty="0" err="1"/>
+              <a:t>Cerved</a:t>
+            </a:r>
+            <a:r>
+              <a:rPr lang="en-US" dirty="0"/>
+              <a:t> Assets</a:t>
+            </a:r>
+          </a:p>
+          <a:p>
+            <a:r>
+              <a:rPr lang="en-US" dirty="0" err="1"/>
+              <a:t>DoValue</a:t>
+            </a:r>
+            <a:r>
+              <a:rPr lang="en-US" dirty="0"/>
+              <a:t> Assets</a:t>
+            </a:r>
+          </a:p>
+          <a:p>
+            <a:r>
+              <a:rPr lang="en-US" dirty="0"/>
+              <a:t>Landea Assets</a:t>
+            </a:r>
+          </a:p>
+          <a:p>
+            <a:r>
+              <a:rPr lang="en-US" dirty="0"/>
+              <a:t>Reinvest Assets</a:t>
+            </a:r>
+          </a:p>
+          <a:p>
+            <a:r>
+              <a:rPr lang="en-US" dirty="0" err="1"/>
+              <a:t>Intrum</a:t>
+            </a:r>
+            <a:r>
+              <a:rPr lang="en-US" dirty="0"/>
+              <a:t> Assets</a:t>
+            </a:r>
+          </a:p>
+          <a:p>
+            <a:r>
+              <a:rPr lang="en-US" dirty="0"/>
+              <a:t>TAX Transactions</a:t>
+            </a:r>
+          </a:p>
+          <a:p>
             <a:endParaRPr lang="en-US" dirty="0"/>
           </a:p>
+          <a:p>
+            <a:r>
+              <a:rPr lang="en-US" dirty="0"/>
+              <a:t>Best Assets View</a:t>
+            </a:r>
+          </a:p>
+          <a:p>
+            <a:endParaRPr lang="en-US" dirty="0"/>
+          </a:p>
+        </p:txBody>
+      </p:sp>
+    </p:spTree>
+    <p:extLst>
+      <p:ext uri="{BB962C8B-B14F-4D97-AF65-F5344CB8AC3E}">
+        <p14:creationId xmlns:p14="http://schemas.microsoft.com/office/powerpoint/2010/main" val="1462212100"/>
+      </p:ext>
+    </p:extLst>
+  </p:cSld>
+  <p:clrMapOvr>
+    <a:masterClrMapping/>
+  </p:clrMapOvr>
+</p:sld>
+</file>
+
+<file path=ppt/slides/slide5.xml><?xml version="1.0" encoding="utf-8"?>
+<p:sld xmlns:a="http://schemas.openxmlformats.org/drawingml/2006/main" xmlns:r="http://schemas.openxmlformats.org/officeDocument/2006/relationships" xmlns:p="http://schemas.openxmlformats.org/presentationml/2006/main">
+  <p:cSld>
+    <p:spTree>
+      <p:nvGrpSpPr>
+        <p:cNvPr id="1" name=""/>
+        <p:cNvGrpSpPr/>
+        <p:nvPr/>
+      </p:nvGrpSpPr>
+      <p:grpSpPr>
+        <a:xfrm>
+          <a:off x="0" y="0"/>
+          <a:ext cx="0" cy="0"/>
+          <a:chOff x="0" y="0"/>
+          <a:chExt cx="0" cy="0"/>
+        </a:xfrm>
+      </p:grpSpPr>
+      <p:sp>
+        <p:nvSpPr>
+          <p:cNvPr id="2" name="Title 1">
+            <a:extLst>
+              <a:ext uri="{FF2B5EF4-FFF2-40B4-BE49-F238E27FC236}">
+                <a16:creationId xmlns:a16="http://schemas.microsoft.com/office/drawing/2014/main" id="{60CC2A28-635B-5356-FC74-EF1634BC24A8}"/>
+              </a:ext>
+            </a:extLst>
+          </p:cNvPr>
+          <p:cNvSpPr>
+            <a:spLocks noGrp="1"/>
+          </p:cNvSpPr>
+          <p:nvPr>
+            <p:ph type="title"/>
+          </p:nvPr>
+        </p:nvSpPr>
+        <p:spPr/>
+        <p:txBody>
+          <a:bodyPr/>
+          <a:lstStyle/>
+          <a:p>
+            <a:r>
+              <a:rPr lang="en-US" dirty="0" err="1"/>
+              <a:t>Cerved</a:t>
+            </a:r>
+            <a:r>
+              <a:rPr lang="en-US" dirty="0"/>
+              <a:t>, </a:t>
+            </a:r>
+            <a:r>
+              <a:rPr lang="en-US" dirty="0" err="1"/>
+              <a:t>ReInvest</a:t>
+            </a:r>
+            <a:r>
+              <a:rPr lang="en-US" dirty="0"/>
+              <a:t>, </a:t>
+            </a:r>
+            <a:r>
+              <a:rPr lang="en-US" dirty="0" err="1"/>
+              <a:t>Intrum</a:t>
+            </a:r>
+            <a:r>
+              <a:rPr lang="en-US" dirty="0"/>
+              <a:t> (WEB to DB)</a:t>
+            </a:r>
+          </a:p>
         </p:txBody>
       </p:sp>
       <p:sp>
@@ -4816,24 +6461,27 @@
             <p:ph idx="1"/>
           </p:nvPr>
         </p:nvSpPr>
-        <p:spPr/>
+        <p:spPr>
+          <a:xfrm>
+            <a:off x="838200" y="1825625"/>
+            <a:ext cx="10515600" cy="4351338"/>
+          </a:xfrm>
+        </p:spPr>
         <p:txBody>
           <a:bodyPr/>
           <a:lstStyle/>
           <a:p>
             <a:r>
               <a:rPr lang="en-US" dirty="0"/>
-              <a:t>All assets by location coordinates</a:t>
-            </a:r>
-          </a:p>
-          <a:p>
+              <a:t>Scrape All Assets. Into “{***}_assets”</a:t>
+            </a:r>
+          </a:p>
+          <a:p>
+            <a:pPr lvl="1"/>
             <a:r>
               <a:rPr lang="en-US" dirty="0"/>
-              <a:t>Asset info</a:t>
-            </a:r>
-          </a:p>
-          <a:p>
-            <a:endParaRPr lang="en-US" dirty="0"/>
+              <a:t>May include inner scraping for each asset in order to get further information</a:t>
+            </a:r>
           </a:p>
         </p:txBody>
       </p:sp>
@@ -4841,6 +6489,253 @@
     <p:extLst>
       <p:ext uri="{BB962C8B-B14F-4D97-AF65-F5344CB8AC3E}">
         <p14:creationId xmlns:p14="http://schemas.microsoft.com/office/powerpoint/2010/main" val="3710909933"/>
+      </p:ext>
+    </p:extLst>
+  </p:cSld>
+  <p:clrMapOvr>
+    <a:masterClrMapping/>
+  </p:clrMapOvr>
+</p:sld>
+</file>
+
+<file path=ppt/slides/slide6.xml><?xml version="1.0" encoding="utf-8"?>
+<p:sld xmlns:a="http://schemas.openxmlformats.org/drawingml/2006/main" xmlns:r="http://schemas.openxmlformats.org/officeDocument/2006/relationships" xmlns:p="http://schemas.openxmlformats.org/presentationml/2006/main">
+  <p:cSld>
+    <p:spTree>
+      <p:nvGrpSpPr>
+        <p:cNvPr id="1" name="">
+          <a:extLst>
+            <a:ext uri="{FF2B5EF4-FFF2-40B4-BE49-F238E27FC236}">
+              <a16:creationId xmlns:a16="http://schemas.microsoft.com/office/drawing/2014/main" id="{B5EF4067-A81D-8DFD-130E-8E008CB7A59F}"/>
+            </a:ext>
+          </a:extLst>
+        </p:cNvPr>
+        <p:cNvGrpSpPr/>
+        <p:nvPr/>
+      </p:nvGrpSpPr>
+      <p:grpSpPr>
+        <a:xfrm>
+          <a:off x="0" y="0"/>
+          <a:ext cx="0" cy="0"/>
+          <a:chOff x="0" y="0"/>
+          <a:chExt cx="0" cy="0"/>
+        </a:xfrm>
+      </p:grpSpPr>
+      <p:sp>
+        <p:nvSpPr>
+          <p:cNvPr id="2" name="Title 1">
+            <a:extLst>
+              <a:ext uri="{FF2B5EF4-FFF2-40B4-BE49-F238E27FC236}">
+                <a16:creationId xmlns:a16="http://schemas.microsoft.com/office/drawing/2014/main" id="{650A3A87-C5AD-C9CD-9298-7EBCD7C0F251}"/>
+              </a:ext>
+            </a:extLst>
+          </p:cNvPr>
+          <p:cNvSpPr>
+            <a:spLocks noGrp="1"/>
+          </p:cNvSpPr>
+          <p:nvPr>
+            <p:ph type="title"/>
+          </p:nvPr>
+        </p:nvSpPr>
+        <p:spPr/>
+        <p:txBody>
+          <a:bodyPr/>
+          <a:lstStyle/>
+          <a:p>
+            <a:r>
+              <a:rPr lang="en-US" dirty="0" err="1"/>
+              <a:t>Spitogatos</a:t>
+            </a:r>
+            <a:r>
+              <a:rPr lang="en-US" dirty="0"/>
+              <a:t> (WEB to DB)</a:t>
+            </a:r>
+          </a:p>
+        </p:txBody>
+      </p:sp>
+      <p:sp>
+        <p:nvSpPr>
+          <p:cNvPr id="3" name="Content Placeholder 2">
+            <a:extLst>
+              <a:ext uri="{FF2B5EF4-FFF2-40B4-BE49-F238E27FC236}">
+                <a16:creationId xmlns:a16="http://schemas.microsoft.com/office/drawing/2014/main" id="{B1D56A83-72AE-7936-AA01-4C42735549C9}"/>
+              </a:ext>
+            </a:extLst>
+          </p:cNvPr>
+          <p:cNvSpPr>
+            <a:spLocks noGrp="1"/>
+          </p:cNvSpPr>
+          <p:nvPr>
+            <p:ph idx="1"/>
+          </p:nvPr>
+        </p:nvSpPr>
+        <p:spPr>
+          <a:xfrm>
+            <a:off x="838200" y="1825625"/>
+            <a:ext cx="10515600" cy="4351338"/>
+          </a:xfrm>
+        </p:spPr>
+        <p:txBody>
+          <a:bodyPr/>
+          <a:lstStyle/>
+          <a:p>
+            <a:r>
+              <a:rPr lang="en-US" dirty="0"/>
+              <a:t>Scrape All Assets. Given Certain Location. Into “</a:t>
+            </a:r>
+            <a:r>
+              <a:rPr lang="en-US" dirty="0" err="1"/>
+              <a:t>spitogatos_assets</a:t>
+            </a:r>
+            <a:r>
+              <a:rPr lang="en-US" dirty="0"/>
+              <a:t>”</a:t>
+            </a:r>
+          </a:p>
+          <a:p>
+            <a:r>
+              <a:rPr lang="en-US" dirty="0"/>
+              <a:t>Scrape Asset info. Given Asset ID. Into “</a:t>
+            </a:r>
+            <a:r>
+              <a:rPr lang="en-US" dirty="0" err="1"/>
+              <a:t>spitogatos_assets</a:t>
+            </a:r>
+            <a:r>
+              <a:rPr lang="en-US" dirty="0"/>
+              <a:t>”</a:t>
+            </a:r>
+          </a:p>
+          <a:p>
+            <a:endParaRPr lang="en-US" dirty="0"/>
+          </a:p>
+        </p:txBody>
+      </p:sp>
+    </p:spTree>
+    <p:extLst>
+      <p:ext uri="{BB962C8B-B14F-4D97-AF65-F5344CB8AC3E}">
+        <p14:creationId xmlns:p14="http://schemas.microsoft.com/office/powerpoint/2010/main" val="1935514996"/>
+      </p:ext>
+    </p:extLst>
+  </p:cSld>
+  <p:clrMapOvr>
+    <a:masterClrMapping/>
+  </p:clrMapOvr>
+</p:sld>
+</file>
+
+<file path=ppt/slides/slide7.xml><?xml version="1.0" encoding="utf-8"?>
+<p:sld xmlns:a="http://schemas.openxmlformats.org/drawingml/2006/main" xmlns:r="http://schemas.openxmlformats.org/officeDocument/2006/relationships" xmlns:p="http://schemas.openxmlformats.org/presentationml/2006/main">
+  <p:cSld>
+    <p:spTree>
+      <p:nvGrpSpPr>
+        <p:cNvPr id="1" name="">
+          <a:extLst>
+            <a:ext uri="{FF2B5EF4-FFF2-40B4-BE49-F238E27FC236}">
+              <a16:creationId xmlns:a16="http://schemas.microsoft.com/office/drawing/2014/main" id="{169E2B2C-2124-32F0-77E0-C9689D2477FC}"/>
+            </a:ext>
+          </a:extLst>
+        </p:cNvPr>
+        <p:cNvGrpSpPr/>
+        <p:nvPr/>
+      </p:nvGrpSpPr>
+      <p:grpSpPr>
+        <a:xfrm>
+          <a:off x="0" y="0"/>
+          <a:ext cx="0" cy="0"/>
+          <a:chOff x="0" y="0"/>
+          <a:chExt cx="0" cy="0"/>
+        </a:xfrm>
+      </p:grpSpPr>
+      <p:sp>
+        <p:nvSpPr>
+          <p:cNvPr id="2" name="Title 1">
+            <a:extLst>
+              <a:ext uri="{FF2B5EF4-FFF2-40B4-BE49-F238E27FC236}">
+                <a16:creationId xmlns:a16="http://schemas.microsoft.com/office/drawing/2014/main" id="{23DA4902-891D-141A-728D-19C31830F875}"/>
+              </a:ext>
+            </a:extLst>
+          </p:cNvPr>
+          <p:cNvSpPr>
+            <a:spLocks noGrp="1"/>
+          </p:cNvSpPr>
+          <p:nvPr>
+            <p:ph type="title"/>
+          </p:nvPr>
+        </p:nvSpPr>
+        <p:spPr/>
+        <p:txBody>
+          <a:bodyPr/>
+          <a:lstStyle/>
+          <a:p>
+            <a:r>
+              <a:rPr lang="en-US" dirty="0"/>
+              <a:t>Inner functions (DB to DB)</a:t>
+            </a:r>
+          </a:p>
+        </p:txBody>
+      </p:sp>
+      <p:sp>
+        <p:nvSpPr>
+          <p:cNvPr id="3" name="Content Placeholder 2">
+            <a:extLst>
+              <a:ext uri="{FF2B5EF4-FFF2-40B4-BE49-F238E27FC236}">
+                <a16:creationId xmlns:a16="http://schemas.microsoft.com/office/drawing/2014/main" id="{E515F77A-62BA-C028-B59A-F14CB025340E}"/>
+              </a:ext>
+            </a:extLst>
+          </p:cNvPr>
+          <p:cNvSpPr>
+            <a:spLocks noGrp="1"/>
+          </p:cNvSpPr>
+          <p:nvPr>
+            <p:ph idx="1"/>
+          </p:nvPr>
+        </p:nvSpPr>
+        <p:spPr>
+          <a:xfrm>
+            <a:off x="838200" y="1825625"/>
+            <a:ext cx="10515600" cy="4351338"/>
+          </a:xfrm>
+        </p:spPr>
+        <p:txBody>
+          <a:bodyPr/>
+          <a:lstStyle/>
+          <a:p>
+            <a:r>
+              <a:rPr lang="en-US" dirty="0"/>
+              <a:t>Image Processing tools for image data (mainly inside URLs).</a:t>
+            </a:r>
+          </a:p>
+          <a:p>
+            <a:pPr lvl="1"/>
+            <a:r>
+              <a:rPr lang="en-US" dirty="0"/>
+              <a:t>TODO: find such a tool</a:t>
+            </a:r>
+          </a:p>
+          <a:p>
+            <a:r>
+              <a:rPr lang="en-US" dirty="0"/>
+              <a:t>Revaluating According to “</a:t>
+            </a:r>
+            <a:r>
+              <a:rPr lang="en-US" dirty="0" err="1"/>
+              <a:t>spitogatos_assets</a:t>
+            </a:r>
+            <a:r>
+              <a:rPr lang="en-US" dirty="0"/>
+              <a:t>” Table</a:t>
+            </a:r>
+          </a:p>
+          <a:p>
+            <a:endParaRPr lang="en-US" dirty="0"/>
+          </a:p>
+        </p:txBody>
+      </p:sp>
+    </p:spTree>
+    <p:extLst>
+      <p:ext uri="{BB962C8B-B14F-4D97-AF65-F5344CB8AC3E}">
+        <p14:creationId xmlns:p14="http://schemas.microsoft.com/office/powerpoint/2010/main" val="304715041"/>
       </p:ext>
     </p:extLst>
   </p:cSld>

--- a/.byhand/structure.pptx
+++ b/.byhand/structure.pptx
@@ -265,7 +265,7 @@
           <a:p>
             <a:fld id="{E7892ED7-ED10-4C0E-B050-E725A33076E1}" type="datetimeFigureOut">
               <a:rPr lang="en-US" smtClean="0"/>
-              <a:t>2/19/2026</a:t>
+              <a:t>3/5/2026</a:t>
             </a:fld>
             <a:endParaRPr lang="en-US"/>
           </a:p>
@@ -463,7 +463,7 @@
           <a:p>
             <a:fld id="{E7892ED7-ED10-4C0E-B050-E725A33076E1}" type="datetimeFigureOut">
               <a:rPr lang="en-US" smtClean="0"/>
-              <a:t>2/19/2026</a:t>
+              <a:t>3/5/2026</a:t>
             </a:fld>
             <a:endParaRPr lang="en-US"/>
           </a:p>
@@ -671,7 +671,7 @@
           <a:p>
             <a:fld id="{E7892ED7-ED10-4C0E-B050-E725A33076E1}" type="datetimeFigureOut">
               <a:rPr lang="en-US" smtClean="0"/>
-              <a:t>2/19/2026</a:t>
+              <a:t>3/5/2026</a:t>
             </a:fld>
             <a:endParaRPr lang="en-US"/>
           </a:p>
@@ -869,7 +869,7 @@
           <a:p>
             <a:fld id="{E7892ED7-ED10-4C0E-B050-E725A33076E1}" type="datetimeFigureOut">
               <a:rPr lang="en-US" smtClean="0"/>
-              <a:t>2/19/2026</a:t>
+              <a:t>3/5/2026</a:t>
             </a:fld>
             <a:endParaRPr lang="en-US"/>
           </a:p>
@@ -1144,7 +1144,7 @@
           <a:p>
             <a:fld id="{E7892ED7-ED10-4C0E-B050-E725A33076E1}" type="datetimeFigureOut">
               <a:rPr lang="en-US" smtClean="0"/>
-              <a:t>2/19/2026</a:t>
+              <a:t>3/5/2026</a:t>
             </a:fld>
             <a:endParaRPr lang="en-US"/>
           </a:p>
@@ -1409,7 +1409,7 @@
           <a:p>
             <a:fld id="{E7892ED7-ED10-4C0E-B050-E725A33076E1}" type="datetimeFigureOut">
               <a:rPr lang="en-US" smtClean="0"/>
-              <a:t>2/19/2026</a:t>
+              <a:t>3/5/2026</a:t>
             </a:fld>
             <a:endParaRPr lang="en-US"/>
           </a:p>
@@ -1821,7 +1821,7 @@
           <a:p>
             <a:fld id="{E7892ED7-ED10-4C0E-B050-E725A33076E1}" type="datetimeFigureOut">
               <a:rPr lang="en-US" smtClean="0"/>
-              <a:t>2/19/2026</a:t>
+              <a:t>3/5/2026</a:t>
             </a:fld>
             <a:endParaRPr lang="en-US"/>
           </a:p>
@@ -1962,7 +1962,7 @@
           <a:p>
             <a:fld id="{E7892ED7-ED10-4C0E-B050-E725A33076E1}" type="datetimeFigureOut">
               <a:rPr lang="en-US" smtClean="0"/>
-              <a:t>2/19/2026</a:t>
+              <a:t>3/5/2026</a:t>
             </a:fld>
             <a:endParaRPr lang="en-US"/>
           </a:p>
@@ -2075,7 +2075,7 @@
           <a:p>
             <a:fld id="{E7892ED7-ED10-4C0E-B050-E725A33076E1}" type="datetimeFigureOut">
               <a:rPr lang="en-US" smtClean="0"/>
-              <a:t>2/19/2026</a:t>
+              <a:t>3/5/2026</a:t>
             </a:fld>
             <a:endParaRPr lang="en-US"/>
           </a:p>
@@ -2386,7 +2386,7 @@
           <a:p>
             <a:fld id="{E7892ED7-ED10-4C0E-B050-E725A33076E1}" type="datetimeFigureOut">
               <a:rPr lang="en-US" smtClean="0"/>
-              <a:t>2/19/2026</a:t>
+              <a:t>3/5/2026</a:t>
             </a:fld>
             <a:endParaRPr lang="en-US"/>
           </a:p>
@@ -2674,7 +2674,7 @@
           <a:p>
             <a:fld id="{E7892ED7-ED10-4C0E-B050-E725A33076E1}" type="datetimeFigureOut">
               <a:rPr lang="en-US" smtClean="0"/>
-              <a:t>2/19/2026</a:t>
+              <a:t>3/5/2026</a:t>
             </a:fld>
             <a:endParaRPr lang="en-US"/>
           </a:p>
@@ -2915,7 +2915,7 @@
           <a:p>
             <a:fld id="{E7892ED7-ED10-4C0E-B050-E725A33076E1}" type="datetimeFigureOut">
               <a:rPr lang="en-US" smtClean="0"/>
-              <a:t>2/19/2026</a:t>
+              <a:t>3/5/2026</a:t>
             </a:fld>
             <a:endParaRPr lang="en-US"/>
           </a:p>
@@ -5806,15 +5806,15 @@
         </p:spPr>
         <p:style>
           <a:lnRef idx="2">
-            <a:schemeClr val="accent4">
+            <a:schemeClr val="accent6">
               <a:shade val="15000"/>
             </a:schemeClr>
           </a:lnRef>
           <a:fillRef idx="1">
-            <a:schemeClr val="accent4"/>
+            <a:schemeClr val="accent6"/>
           </a:fillRef>
           <a:effectRef idx="0">
-            <a:schemeClr val="accent4"/>
+            <a:schemeClr val="accent6"/>
           </a:effectRef>
           <a:fontRef idx="minor">
             <a:schemeClr val="lt1"/>
@@ -5953,15 +5953,15 @@
         </p:spPr>
         <p:style>
           <a:lnRef idx="2">
-            <a:schemeClr val="accent4">
+            <a:schemeClr val="accent1">
               <a:shade val="15000"/>
             </a:schemeClr>
           </a:lnRef>
           <a:fillRef idx="1">
-            <a:schemeClr val="accent4"/>
+            <a:schemeClr val="accent1"/>
           </a:fillRef>
           <a:effectRef idx="0">
-            <a:schemeClr val="accent4"/>
+            <a:schemeClr val="accent1"/>
           </a:effectRef>
           <a:fontRef idx="minor">
             <a:schemeClr val="lt1"/>
